--- a/decks/perfect-is-a-trap-lesson-v2.pptx
+++ b/decks/perfect-is-a-trap-lesson-v2.pptx
@@ -16,6 +16,7 @@
     <p:sldId id="264" r:id="rId16"/>
     <p:sldId id="265" r:id="rId17"/>
     <p:sldId id="266" r:id="rId18"/>
+    <p:sldId id="267" r:id="rId19"/>
   </p:sldIdLst>
   <p:sldSz cx="12192000" cy="6858000" type="screen4x3"/>
   <p:notesSz cx="6858000" cy="9144000"/>
@@ -512,7 +513,7 @@
           <a:lstStyle/>
           <a:p>
             <a:r>
-              <a:t>This page and the next three are hidden. They stay in the deck for you and are skipped when you present.</a:t>
+              <a:t>This page is hidden and skipped when you present. The full plan, care notes and research are on the hidden pages at the end of the deck, if you want them.</a:t>
             </a:r>
           </a:p>
         </p:txBody>
@@ -1003,6 +1004,76 @@
           <a:p>
             <a:r>
               <a:t>2 MINUTES. Invite, don't assign: "If you want to try one this week, pick something small." The point is to predict what will happen, then check what did. Close with the line from the student page: healthy striving says "I want to do well." Perfectionism says "I have to, or I'm not okay." Share the student page link. It has the done line, the other tools, the myths, a private check-in, and when to get more help. Say plainly that if fear of mistakes is getting in the way of sleeping, eating, or enjoying anything, a counselor is a good person to talk to, and can help with family conversations about pressure if a student wants that.</a:t>
+            </a:r>
+          </a:p>
+        </p:txBody>
+      </p:sp>
+      <p:sp>
+        <p:nvSpPr>
+          <p:cNvPr id="4" name="Slide Number Placeholder 3"/>
+          <p:cNvSpPr>
+            <a:spLocks noGrp="1"/>
+          </p:cNvSpPr>
+          <p:nvPr>
+            <p:ph type="sldNum" idx="5" sz="quarter"/>
+          </p:nvPr>
+        </p:nvSpPr>
+        <p:spPr/>
+      </p:sp>
+    </p:spTree>
+  </p:cSld>
+  <p:clrMapOvr>
+    <a:masterClrMapping/>
+  </p:clrMapOvr>
+</p:notes>
+</file>
+
+<file path=ppt/notesSlides/notesSlide9.xml><?xml version="1.0" encoding="utf-8"?>
+<p:notes xmlns:a="http://schemas.openxmlformats.org/drawingml/2006/main" xmlns:p="http://schemas.openxmlformats.org/presentationml/2006/main" xmlns:r="http://schemas.openxmlformats.org/officeDocument/2006/relationships">
+  <p:cSld>
+    <p:spTree>
+      <p:nvGrpSpPr>
+        <p:cNvPr id="1" name=""/>
+        <p:cNvGrpSpPr/>
+        <p:nvPr/>
+      </p:nvGrpSpPr>
+      <p:grpSpPr>
+        <a:xfrm>
+          <a:off x="0" y="0"/>
+          <a:ext cx="0" cy="0"/>
+          <a:chOff x="0" y="0"/>
+          <a:chExt cx="0" cy="0"/>
+        </a:xfrm>
+      </p:grpSpPr>
+      <p:sp>
+        <p:nvSpPr>
+          <p:cNvPr id="2" name="Slide Image Placeholder 1"/>
+          <p:cNvSpPr>
+            <a:spLocks noGrp="1"/>
+          </p:cNvSpPr>
+          <p:nvPr>
+            <p:ph type="sldImg" idx="2"/>
+          </p:nvPr>
+        </p:nvSpPr>
+        <p:spPr/>
+      </p:sp>
+      <p:sp>
+        <p:nvSpPr>
+          <p:cNvPr id="3" name="Notes Placeholder 2"/>
+          <p:cNvSpPr>
+            <a:spLocks noGrp="1"/>
+          </p:cNvSpPr>
+          <p:nvPr>
+            <p:ph type="body" idx="3" sz="quarter"/>
+          </p:nvPr>
+        </p:nvSpPr>
+        <p:spPr/>
+        <p:txBody>
+          <a:bodyPr/>
+          <a:lstStyle/>
+          <a:p>
+            <a:r>
+              <a:t>If you want more: this page and the next three are hidden and skipped when you present.</a:t>
             </a:r>
           </a:p>
         </p:txBody>
@@ -4094,7 +4165,7 @@
                 </a:solidFill>
                 <a:latin typeface="Inter Tight"/>
               </a:rPr>
-              <a:t>TEACHER PAGE  ·  skipped when you present  ·  Lesson plan</a:t>
+              <a:t>TEACHER PAGE  ·  skipped when you present  ·  Before you start</a:t>
             </a:r>
           </a:p>
         </p:txBody>
@@ -4185,8 +4256,8 @@
         </p:nvSpPr>
         <p:spPr>
           <a:xfrm>
-            <a:off x="548640" y="1828800"/>
-            <a:ext cx="5120640" cy="4389120"/>
+            <a:off x="548640" y="2011680"/>
+            <a:ext cx="11064240" cy="4206240"/>
           </a:xfrm>
           <a:prstGeom prst="rect">
             <a:avLst/>
@@ -4201,43 +4272,43 @@
           <a:p>
             <a:pPr algn="l">
               <a:spcAft>
-                <a:spcPts val="675"/>
-              </a:spcAft>
-            </a:pPr>
-            <a:r>
-              <a:rPr sz="1100" b="1" i="0">
+                <a:spcPts val="900"/>
+              </a:spcAft>
+            </a:pPr>
+            <a:r>
+              <a:rPr sz="1200" b="1" i="0">
                 <a:solidFill>
                   <a:srgbClr val="0B2D5B"/>
                 </a:solidFill>
                 <a:latin typeface="Inter Tight"/>
               </a:rPr>
-              <a:t>GOAL</a:t>
-            </a:r>
-          </a:p>
-          <a:p>
-            <a:pPr algn="l">
-              <a:spcAft>
-                <a:spcPts val="675"/>
-              </a:spcAft>
-            </a:pPr>
-            <a:r>
-              <a:rPr sz="1500" b="0" i="0">
+              <a:t>BEFORE YOU START</a:t>
+            </a:r>
+          </a:p>
+          <a:p>
+            <a:pPr algn="l">
+              <a:spcAft>
+                <a:spcPts val="900"/>
+              </a:spcAft>
+            </a:pPr>
+            <a:r>
+              <a:rPr sz="2000" b="0" i="0">
                 <a:solidFill>
                   <a:srgbClr val="1C1B19"/>
                 </a:solidFill>
                 <a:latin typeface="Source Serif 4"/>
               </a:rPr>
-              <a:t>Students can tell high standards apart from the fear of mistakes, set a done line on one real task, and pick a small mistake experiment if they want to try one. Nobody shares grades or scores.</a:t>
-            </a:r>
-          </a:p>
-          <a:p>
-            <a:pPr algn="l">
-              <a:spcAft>
-                <a:spcPts val="675"/>
-              </a:spcAft>
-            </a:pPr>
-            <a:r>
-              <a:rPr sz="1500" b="0" i="0">
+              <a:t>Students learn to tell high standards apart from fear of mistakes, set a done line on one real task, and maybe try a small mistake experiment. Bring index cards, keep the stand-up items light, and never ask about grades, scores, or college lists.</a:t>
+            </a:r>
+          </a:p>
+          <a:p>
+            <a:pPr algn="l">
+              <a:spcAft>
+                <a:spcPts val="900"/>
+              </a:spcAft>
+            </a:pPr>
+            <a:r>
+              <a:rPr sz="2000" b="0" i="0">
                 <a:solidFill>
                   <a:srgbClr val="1C1B19"/>
                 </a:solidFill>
@@ -4249,277 +4320,33 @@
           <a:p>
             <a:pPr algn="l">
               <a:spcAft>
-                <a:spcPts val="675"/>
-              </a:spcAft>
-            </a:pPr>
-            <a:r>
-              <a:rPr sz="1100" b="1" i="0">
+                <a:spcPts val="900"/>
+              </a:spcAft>
+            </a:pPr>
+            <a:r>
+              <a:rPr sz="1200" b="1" i="0">
                 <a:solidFill>
                   <a:srgbClr val="0B2D5B"/>
                 </a:solidFill>
                 <a:latin typeface="Inter Tight"/>
               </a:rPr>
-              <a:t>MATERIALS</a:t>
-            </a:r>
-          </a:p>
-          <a:p>
-            <a:pPr algn="l">
-              <a:spcAft>
-                <a:spcPts val="675"/>
-              </a:spcAft>
-            </a:pPr>
-            <a:r>
-              <a:rPr sz="1500" b="0" i="0">
+              <a:t>EVERY STUDENT IN THE ROOM</a:t>
+            </a:r>
+          </a:p>
+          <a:p>
+            <a:pPr algn="l">
+              <a:spcAft>
+                <a:spcPts val="900"/>
+              </a:spcAft>
+            </a:pPr>
+            <a:r>
+              <a:rPr sz="2000" b="0" i="0">
                 <a:solidFill>
                   <a:srgbClr val="1C1B19"/>
                 </a:solidFill>
                 <a:latin typeface="Source Serif 4"/>
               </a:rPr>
-              <a:t>Index cards for the private done line</a:t>
-            </a:r>
-          </a:p>
-          <a:p>
-            <a:pPr algn="l">
-              <a:spcAft>
-                <a:spcPts val="675"/>
-              </a:spcAft>
-            </a:pPr>
-            <a:r>
-              <a:rPr sz="1500" b="0" i="0">
-                <a:solidFill>
-                  <a:srgbClr val="1C1B19"/>
-                </a:solidFill>
-                <a:latin typeface="Source Serif 4"/>
-              </a:rPr>
-              <a:t>Open floor space for the stand-up, sit-down opener</a:t>
-            </a:r>
-          </a:p>
-          <a:p>
-            <a:pPr algn="l">
-              <a:spcAft>
-                <a:spcPts val="675"/>
-              </a:spcAft>
-            </a:pPr>
-            <a:r>
-              <a:rPr sz="1500" b="0" i="0">
-                <a:solidFill>
-                  <a:srgbClr val="1C1B19"/>
-                </a:solidFill>
-                <a:latin typeface="Source Serif 4"/>
-              </a:rPr>
-              <a:t>The student page link (last slide) to share after advisory</a:t>
-            </a:r>
-          </a:p>
-        </p:txBody>
-      </p:sp>
-      <p:sp>
-        <p:nvSpPr>
-          <p:cNvPr id="7" name="TextBox 6"/>
-          <p:cNvSpPr txBox="1"/>
-          <p:nvPr/>
-        </p:nvSpPr>
-        <p:spPr>
-          <a:xfrm>
-            <a:off x="6126480" y="1828800"/>
-            <a:ext cx="5486400" cy="4389120"/>
-          </a:xfrm>
-          <a:prstGeom prst="rect">
-            <a:avLst/>
-          </a:prstGeom>
-          <a:noFill/>
-        </p:spPr>
-        <p:txBody>
-          <a:bodyPr wrap="square" anchor="t" lIns="0" rIns="0" tIns="0" bIns="0">
-            <a:spAutoFit/>
-          </a:bodyPr>
-          <a:lstStyle/>
-          <a:p>
-            <a:pPr algn="l">
-              <a:spcAft>
-                <a:spcPts val="630"/>
-              </a:spcAft>
-            </a:pPr>
-            <a:r>
-              <a:rPr sz="1100" b="1" i="0">
-                <a:solidFill>
-                  <a:srgbClr val="0B2D5B"/>
-                </a:solidFill>
-                <a:latin typeface="Inter Tight"/>
-              </a:rPr>
-              <a:t>FLOW</a:t>
-            </a:r>
-          </a:p>
-          <a:p>
-            <a:pPr algn="l">
-              <a:spcAft>
-                <a:spcPts val="630"/>
-              </a:spcAft>
-            </a:pPr>
-            <a:r>
-              <a:rPr sz="1300" b="1" i="0">
-                <a:solidFill>
-                  <a:srgbClr val="F47B20"/>
-                </a:solidFill>
-                <a:latin typeface="Inter Tight"/>
-              </a:rPr>
-              <a:t>4 min   </a:t>
-            </a:r>
-            <a:r>
-              <a:rPr sz="1400" b="0" i="0">
-                <a:solidFill>
-                  <a:srgbClr val="1C1B19"/>
-                </a:solidFill>
-                <a:latin typeface="Source Serif 4"/>
-              </a:rPr>
-              <a:t>Sound familiar? (stand up, sit down)</a:t>
-            </a:r>
-          </a:p>
-          <a:p>
-            <a:pPr algn="l">
-              <a:spcAft>
-                <a:spcPts val="630"/>
-              </a:spcAft>
-            </a:pPr>
-            <a:r>
-              <a:rPr sz="1300" b="1" i="0">
-                <a:solidFill>
-                  <a:srgbClr val="F47B20"/>
-                </a:solidFill>
-                <a:latin typeface="Inter Tight"/>
-              </a:rPr>
-              <a:t>6 min   </a:t>
-            </a:r>
-            <a:r>
-              <a:rPr sz="1400" b="0" i="0">
-                <a:solidFill>
-                  <a:srgbClr val="1C1B19"/>
-                </a:solidFill>
-                <a:latin typeface="Source Serif 4"/>
-              </a:rPr>
-              <a:t>Two parts, and why it's rising</a:t>
-            </a:r>
-          </a:p>
-          <a:p>
-            <a:pPr algn="l">
-              <a:spcAft>
-                <a:spcPts val="630"/>
-              </a:spcAft>
-            </a:pPr>
-            <a:r>
-              <a:rPr sz="1300" b="1" i="0">
-                <a:solidFill>
-                  <a:srgbClr val="F47B20"/>
-                </a:solidFill>
-                <a:latin typeface="Inter Tight"/>
-              </a:rPr>
-              <a:t>5 min   </a:t>
-            </a:r>
-            <a:r>
-              <a:rPr sz="1400" b="0" i="0">
-                <a:solidFill>
-                  <a:srgbClr val="1C1B19"/>
-                </a:solidFill>
-                <a:latin typeface="Source Serif 4"/>
-              </a:rPr>
-              <a:t>Which thought is the trap? (pairs)</a:t>
-            </a:r>
-          </a:p>
-          <a:p>
-            <a:pPr algn="l">
-              <a:spcAft>
-                <a:spcPts val="630"/>
-              </a:spcAft>
-            </a:pPr>
-            <a:r>
-              <a:rPr sz="1300" b="1" i="0">
-                <a:solidFill>
-                  <a:srgbClr val="F47B20"/>
-                </a:solidFill>
-                <a:latin typeface="Inter Tight"/>
-              </a:rPr>
-              <a:t>3 min   </a:t>
-            </a:r>
-            <a:r>
-              <a:rPr sz="1400" b="0" i="0">
-                <a:solidFill>
-                  <a:srgbClr val="1C1B19"/>
-                </a:solidFill>
-                <a:latin typeface="Source Serif 4"/>
-              </a:rPr>
-              <a:t>Set a done line (private card)</a:t>
-            </a:r>
-          </a:p>
-          <a:p>
-            <a:pPr algn="l">
-              <a:spcAft>
-                <a:spcPts val="630"/>
-              </a:spcAft>
-            </a:pPr>
-            <a:r>
-              <a:rPr sz="1300" b="1" i="0">
-                <a:solidFill>
-                  <a:srgbClr val="F47B20"/>
-                </a:solidFill>
-                <a:latin typeface="Inter Tight"/>
-              </a:rPr>
-              <a:t>2 min   </a:t>
-            </a:r>
-            <a:r>
-              <a:rPr sz="1400" b="0" i="0">
-                <a:solidFill>
-                  <a:srgbClr val="1C1B19"/>
-                </a:solidFill>
-                <a:latin typeface="Source Serif 4"/>
-              </a:rPr>
-              <a:t>One mistake experiment and the student page</a:t>
-            </a:r>
-          </a:p>
-          <a:p>
-            <a:pPr algn="l">
-              <a:spcAft>
-                <a:spcPts val="630"/>
-              </a:spcAft>
-            </a:pPr>
-            <a:r>
-              <a:rPr sz="1400" b="0" i="0">
-                <a:solidFill>
-                  <a:srgbClr val="1C1B19"/>
-                </a:solidFill>
-                <a:latin typeface="Source Serif 4"/>
-              </a:rPr>
-              <a:t/>
-            </a:r>
-          </a:p>
-          <a:p>
-            <a:pPr algn="l">
-              <a:spcAft>
-                <a:spcPts val="630"/>
-              </a:spcAft>
-            </a:pPr>
-            <a:r>
-              <a:rPr sz="1100" b="1" i="0">
-                <a:solidFill>
-                  <a:srgbClr val="0B2D5B"/>
-                </a:solidFill>
-                <a:latin typeface="Inter Tight"/>
-              </a:rPr>
-              <a:t>SHORT ON TIME (10-MINUTE CHECK-IN)</a:t>
-            </a:r>
-          </a:p>
-          <a:p>
-            <a:pPr algn="l">
-              <a:spcAft>
-                <a:spcPts val="630"/>
-              </a:spcAft>
-            </a:pPr>
-            <a:r>
-              <a:rPr sz="1400" b="0" i="0">
-                <a:solidFill>
-                  <a:srgbClr val="1C1B19"/>
-                </a:solidFill>
-                <a:latin typeface="Source Serif 4"/>
-              </a:rPr>
-              <a:t>Sound familiar? (2), the two parts (3), set a done line (3), one mistake experiment and the student page (2).</a:t>
+              <a:t>For some students a grade carries a family's sacrifice or being first to college; honor that, and let students with a learning plan set their own time limits.</a:t>
             </a:r>
           </a:p>
         </p:txBody>
@@ -4533,6 +4360,1660 @@
 </file>
 
 <file path=ppt/slides/slide10.xml><?xml version="1.0" encoding="utf-8"?>
+<p:sld xmlns:a="http://schemas.openxmlformats.org/drawingml/2006/main" xmlns:p="http://schemas.openxmlformats.org/presentationml/2006/main" xmlns:r="http://schemas.openxmlformats.org/officeDocument/2006/relationships" show="0">
+  <p:cSld>
+    <p:bg>
+      <p:bgPr>
+        <a:solidFill>
+          <a:srgbClr val="EEEBE4"/>
+        </a:solidFill>
+        <a:effectLst/>
+      </p:bgPr>
+    </p:bg>
+    <p:spTree>
+      <p:nvGrpSpPr>
+        <p:cNvPr id="1" name=""/>
+        <p:cNvGrpSpPr/>
+        <p:nvPr/>
+      </p:nvGrpSpPr>
+      <p:grpSpPr/>
+      <p:sp>
+        <p:nvSpPr>
+          <p:cNvPr id="2" name="Rectangle 1"/>
+          <p:cNvSpPr/>
+          <p:nvPr/>
+        </p:nvSpPr>
+        <p:spPr>
+          <a:xfrm>
+            <a:off x="0" y="0"/>
+            <a:ext cx="12191695" cy="384048"/>
+          </a:xfrm>
+          <a:prstGeom prst="rect">
+            <a:avLst/>
+          </a:prstGeom>
+          <a:solidFill>
+            <a:srgbClr val="0B2D5B"/>
+          </a:solidFill>
+          <a:ln>
+            <a:noFill/>
+          </a:ln>
+          <a:effectLst/>
+        </p:spPr>
+        <p:style>
+          <a:lnRef idx="1">
+            <a:schemeClr val="accent1"/>
+          </a:lnRef>
+          <a:fillRef idx="3">
+            <a:schemeClr val="accent1"/>
+          </a:fillRef>
+          <a:effectRef idx="2">
+            <a:schemeClr val="accent1"/>
+          </a:effectRef>
+          <a:fontRef idx="minor">
+            <a:schemeClr val="lt1"/>
+          </a:fontRef>
+        </p:style>
+        <p:txBody>
+          <a:bodyPr rtlCol="0" anchor="ctr"/>
+          <a:lstStyle/>
+          <a:p>
+            <a:pPr algn="ctr"/>
+          </a:p>
+        </p:txBody>
+      </p:sp>
+      <p:sp>
+        <p:nvSpPr>
+          <p:cNvPr id="3" name="TextBox 2"/>
+          <p:cNvSpPr txBox="1"/>
+          <p:nvPr/>
+        </p:nvSpPr>
+        <p:spPr>
+          <a:xfrm>
+            <a:off x="548640" y="100584"/>
+            <a:ext cx="10972800" cy="274320"/>
+          </a:xfrm>
+          <a:prstGeom prst="rect">
+            <a:avLst/>
+          </a:prstGeom>
+          <a:noFill/>
+        </p:spPr>
+        <p:txBody>
+          <a:bodyPr wrap="square" anchor="t" lIns="0" rIns="0" tIns="0" bIns="0">
+            <a:spAutoFit/>
+          </a:bodyPr>
+          <a:lstStyle/>
+          <a:p>
+            <a:pPr algn="l">
+              <a:spcAft>
+                <a:spcPts val="495"/>
+              </a:spcAft>
+            </a:pPr>
+            <a:r>
+              <a:rPr sz="1100" b="1" i="0">
+                <a:solidFill>
+                  <a:srgbClr val="FFFFFF"/>
+                </a:solidFill>
+                <a:latin typeface="Inter Tight"/>
+              </a:rPr>
+              <a:t>TEACHER PAGE  ·  skipped when you present  ·  Before you teach</a:t>
+            </a:r>
+          </a:p>
+        </p:txBody>
+      </p:sp>
+      <p:sp>
+        <p:nvSpPr>
+          <p:cNvPr id="4" name="TextBox 3"/>
+          <p:cNvSpPr txBox="1"/>
+          <p:nvPr/>
+        </p:nvSpPr>
+        <p:spPr>
+          <a:xfrm>
+            <a:off x="548640" y="685800"/>
+            <a:ext cx="10972800" cy="640080"/>
+          </a:xfrm>
+          <a:prstGeom prst="rect">
+            <a:avLst/>
+          </a:prstGeom>
+          <a:noFill/>
+        </p:spPr>
+        <p:txBody>
+          <a:bodyPr wrap="square" anchor="t" lIns="0" rIns="0" tIns="0" bIns="0">
+            <a:spAutoFit/>
+          </a:bodyPr>
+          <a:lstStyle/>
+          <a:p>
+            <a:pPr algn="l">
+              <a:spcAft>
+                <a:spcPts val="1350"/>
+              </a:spcAft>
+            </a:pPr>
+            <a:r>
+              <a:rPr sz="3000" b="1" i="0">
+                <a:solidFill>
+                  <a:srgbClr val="1C1B19"/>
+                </a:solidFill>
+                <a:latin typeface="Source Serif 4"/>
+              </a:rPr>
+              <a:t>Before you teach</a:t>
+            </a:r>
+          </a:p>
+        </p:txBody>
+      </p:sp>
+      <p:sp>
+        <p:nvSpPr>
+          <p:cNvPr id="5" name="TextBox 4"/>
+          <p:cNvSpPr txBox="1"/>
+          <p:nvPr/>
+        </p:nvSpPr>
+        <p:spPr>
+          <a:xfrm>
+            <a:off x="548640" y="1463040"/>
+            <a:ext cx="5394960" cy="4937760"/>
+          </a:xfrm>
+          <a:prstGeom prst="rect">
+            <a:avLst/>
+          </a:prstGeom>
+          <a:noFill/>
+        </p:spPr>
+        <p:txBody>
+          <a:bodyPr wrap="square" anchor="t" lIns="0" rIns="0" tIns="0" bIns="0">
+            <a:spAutoFit/>
+          </a:bodyPr>
+          <a:lstStyle/>
+          <a:p>
+            <a:pPr algn="l">
+              <a:spcAft>
+                <a:spcPts val="585"/>
+              </a:spcAft>
+            </a:pPr>
+            <a:r>
+              <a:rPr sz="1500" b="1" i="0">
+                <a:solidFill>
+                  <a:srgbClr val="1C1B19"/>
+                </a:solidFill>
+                <a:latin typeface="Source Serif 4"/>
+              </a:rPr>
+              <a:t>Nobody shares grades or scores.</a:t>
+            </a:r>
+          </a:p>
+          <a:p>
+            <a:pPr algn="l">
+              <a:spcAft>
+                <a:spcPts val="585"/>
+              </a:spcAft>
+            </a:pPr>
+            <a:r>
+              <a:rPr sz="1300" b="0" i="0">
+                <a:solidFill>
+                  <a:srgbClr val="1C1B19"/>
+                </a:solidFill>
+                <a:latin typeface="Source Serif 4"/>
+              </a:rPr>
+              <a:t>Keep to the examples on the slides. Don't ask what anyone got, where they're applying, or how they compare. In a small advisory, students already know a lot about each other's classes and results.</a:t>
+            </a:r>
+          </a:p>
+          <a:p>
+            <a:pPr algn="l">
+              <a:spcAft>
+                <a:spcPts val="585"/>
+              </a:spcAft>
+            </a:pPr>
+            <a:r>
+              <a:rPr sz="1300" b="0" i="0">
+                <a:solidFill>
+                  <a:srgbClr val="1C1B19"/>
+                </a:solidFill>
+                <a:latin typeface="Source Serif 4"/>
+              </a:rPr>
+              <a:t/>
+            </a:r>
+          </a:p>
+          <a:p>
+            <a:pPr algn="l">
+              <a:spcAft>
+                <a:spcPts val="585"/>
+              </a:spcAft>
+            </a:pPr>
+            <a:r>
+              <a:rPr sz="1500" b="1" i="0">
+                <a:solidFill>
+                  <a:srgbClr val="1C1B19"/>
+                </a:solidFill>
+                <a:latin typeface="Source Serif 4"/>
+              </a:rPr>
+              <a:t>Keep the stand-up items light.</a:t>
+            </a:r>
+          </a:p>
+          <a:p>
+            <a:pPr algn="l">
+              <a:spcAft>
+                <a:spcPts val="585"/>
+              </a:spcAft>
+            </a:pPr>
+            <a:r>
+              <a:rPr sz="1300" b="0" i="0">
+                <a:solidFill>
+                  <a:srgbClr val="1C1B19"/>
+                </a:solidFill>
+                <a:latin typeface="Source Serif 4"/>
+              </a:rPr>
+              <a:t>Use the five in the notes. Staying seated is always fine, and don't comment on who stood. Leave out food, bodies and sleep loss as items, because standing for those can single someone out.</a:t>
+            </a:r>
+          </a:p>
+          <a:p>
+            <a:pPr algn="l">
+              <a:spcAft>
+                <a:spcPts val="585"/>
+              </a:spcAft>
+            </a:pPr>
+            <a:r>
+              <a:rPr sz="1300" b="0" i="0">
+                <a:solidFill>
+                  <a:srgbClr val="1C1B19"/>
+                </a:solidFill>
+                <a:latin typeface="Source Serif 4"/>
+              </a:rPr>
+              <a:t/>
+            </a:r>
+          </a:p>
+          <a:p>
+            <a:pPr algn="l">
+              <a:spcAft>
+                <a:spcPts val="585"/>
+              </a:spcAft>
+            </a:pPr>
+            <a:r>
+              <a:rPr sz="1500" b="1" i="0">
+                <a:solidFill>
+                  <a:srgbClr val="1C1B19"/>
+                </a:solidFill>
+                <a:latin typeface="Source Serif 4"/>
+              </a:rPr>
+              <a:t>Watch for the heavier signs, without screening.</a:t>
+            </a:r>
+          </a:p>
+          <a:p>
+            <a:pPr algn="l">
+              <a:spcAft>
+                <a:spcPts val="585"/>
+              </a:spcAft>
+            </a:pPr>
+            <a:r>
+              <a:rPr sz="1300" b="0" i="0">
+                <a:solidFill>
+                  <a:srgbClr val="1C1B19"/>
+                </a:solidFill>
+                <a:latin typeface="Source Serif 4"/>
+              </a:rPr>
+              <a:t>The student page names restricting food, over-exercising, or hurting yourself when things aren't perfect as reasons to get help. Don't ask about these in the circle. If a student says something that worries you, thank them, follow up privately, and connect them with a counselor the same day.</a:t>
+            </a:r>
+          </a:p>
+          <a:p>
+            <a:pPr algn="l">
+              <a:spcAft>
+                <a:spcPts val="585"/>
+              </a:spcAft>
+            </a:pPr>
+            <a:r>
+              <a:rPr sz="1300" b="0" i="0">
+                <a:solidFill>
+                  <a:srgbClr val="1C1B19"/>
+                </a:solidFill>
+                <a:latin typeface="Source Serif 4"/>
+              </a:rPr>
+              <a:t/>
+            </a:r>
+          </a:p>
+        </p:txBody>
+      </p:sp>
+      <p:sp>
+        <p:nvSpPr>
+          <p:cNvPr id="6" name="TextBox 5"/>
+          <p:cNvSpPr txBox="1"/>
+          <p:nvPr/>
+        </p:nvSpPr>
+        <p:spPr>
+          <a:xfrm>
+            <a:off x="6217920" y="1463040"/>
+            <a:ext cx="5394960" cy="4937760"/>
+          </a:xfrm>
+          <a:prstGeom prst="rect">
+            <a:avLst/>
+          </a:prstGeom>
+          <a:noFill/>
+        </p:spPr>
+        <p:txBody>
+          <a:bodyPr wrap="square" anchor="t" lIns="0" rIns="0" tIns="0" bIns="0">
+            <a:spAutoFit/>
+          </a:bodyPr>
+          <a:lstStyle/>
+          <a:p>
+            <a:pPr algn="l">
+              <a:spcAft>
+                <a:spcPts val="585"/>
+              </a:spcAft>
+            </a:pPr>
+            <a:r>
+              <a:rPr sz="1500" b="1" i="0">
+                <a:solidFill>
+                  <a:srgbClr val="1C1B19"/>
+                </a:solidFill>
+                <a:latin typeface="Source Serif 4"/>
+              </a:rPr>
+              <a:t>Don't make it about blaming families.</a:t>
+            </a:r>
+          </a:p>
+          <a:p>
+            <a:pPr algn="l">
+              <a:spcAft>
+                <a:spcPts val="585"/>
+              </a:spcAft>
+            </a:pPr>
+            <a:r>
+              <a:rPr sz="1300" b="0" i="0">
+                <a:solidFill>
+                  <a:srgbClr val="1C1B19"/>
+                </a:solidFill>
+                <a:latin typeface="Source Serif 4"/>
+              </a:rPr>
+              <a:t>The 2022 research on parents' expectations is a correlation. Many students feel love and pressure from the same people. Let both be true, and keep the "where does it come from" question private.</a:t>
+            </a:r>
+          </a:p>
+          <a:p>
+            <a:pPr algn="l">
+              <a:spcAft>
+                <a:spcPts val="585"/>
+              </a:spcAft>
+            </a:pPr>
+            <a:r>
+              <a:rPr sz="1300" b="0" i="0">
+                <a:solidFill>
+                  <a:srgbClr val="1C1B19"/>
+                </a:solidFill>
+                <a:latin typeface="Source Serif 4"/>
+              </a:rPr>
+              <a:t/>
+            </a:r>
+          </a:p>
+          <a:p>
+            <a:pPr algn="l">
+              <a:spcAft>
+                <a:spcPts val="585"/>
+              </a:spcAft>
+            </a:pPr>
+            <a:r>
+              <a:rPr sz="1500" b="1" i="0">
+                <a:solidFill>
+                  <a:srgbClr val="1C1B19"/>
+                </a:solidFill>
+                <a:latin typeface="Source Serif 4"/>
+              </a:rPr>
+              <a:t>Not everyone in the circle is chasing a 94.</a:t>
+            </a:r>
+          </a:p>
+          <a:p>
+            <a:pPr algn="l">
+              <a:spcAft>
+                <a:spcPts val="585"/>
+              </a:spcAft>
+            </a:pPr>
+            <a:r>
+              <a:rPr sz="1300" b="0" i="0">
+                <a:solidFill>
+                  <a:srgbClr val="1C1B19"/>
+                </a:solidFill>
+                <a:latin typeface="Source Serif 4"/>
+              </a:rPr>
+              <a:t>Some students are working hard to pass, and talk about "easing up" can sound like it's meant for other people. The done line and grading the process help with any grade. Keep examples about effort and time rather than high scores.</a:t>
+            </a:r>
+          </a:p>
+          <a:p>
+            <a:pPr algn="l">
+              <a:spcAft>
+                <a:spcPts val="585"/>
+              </a:spcAft>
+            </a:pPr>
+            <a:r>
+              <a:rPr sz="1300" b="0" i="0">
+                <a:solidFill>
+                  <a:srgbClr val="1C1B19"/>
+                </a:solidFill>
+                <a:latin typeface="Source Serif 4"/>
+              </a:rPr>
+              <a:t/>
+            </a:r>
+          </a:p>
+          <a:p>
+            <a:pPr algn="l">
+              <a:spcAft>
+                <a:spcPts val="585"/>
+              </a:spcAft>
+            </a:pPr>
+            <a:r>
+              <a:rPr sz="1500" b="1" i="0">
+                <a:solidFill>
+                  <a:srgbClr val="1C1B19"/>
+                </a:solidFill>
+                <a:latin typeface="Source Serif 4"/>
+              </a:rPr>
+              <a:t>Model it if you can.</a:t>
+            </a:r>
+          </a:p>
+          <a:p>
+            <a:pPr algn="l">
+              <a:spcAft>
+                <a:spcPts val="585"/>
+              </a:spcAft>
+            </a:pPr>
+            <a:r>
+              <a:rPr sz="1300" b="0" i="0">
+                <a:solidFill>
+                  <a:srgbClr val="1C1B19"/>
+                </a:solidFill>
+                <a:latin typeface="Source Serif 4"/>
+              </a:rPr>
+              <a:t>A quick, true example of your own done line, or a mistake that turned out fine, helps more than a lecture. Keep it short and low stakes.</a:t>
+            </a:r>
+          </a:p>
+          <a:p>
+            <a:pPr algn="l">
+              <a:spcAft>
+                <a:spcPts val="585"/>
+              </a:spcAft>
+            </a:pPr>
+            <a:r>
+              <a:rPr sz="1300" b="0" i="0">
+                <a:solidFill>
+                  <a:srgbClr val="1C1B19"/>
+                </a:solidFill>
+                <a:latin typeface="Source Serif 4"/>
+              </a:rPr>
+              <a:t/>
+            </a:r>
+          </a:p>
+        </p:txBody>
+      </p:sp>
+    </p:spTree>
+  </p:cSld>
+  <p:clrMapOvr>
+    <a:masterClrMapping/>
+  </p:clrMapOvr>
+</p:sld>
+</file>
+
+<file path=ppt/slides/slide11.xml><?xml version="1.0" encoding="utf-8"?>
+<p:sld xmlns:a="http://schemas.openxmlformats.org/drawingml/2006/main" xmlns:p="http://schemas.openxmlformats.org/presentationml/2006/main" xmlns:r="http://schemas.openxmlformats.org/officeDocument/2006/relationships" show="0">
+  <p:cSld>
+    <p:bg>
+      <p:bgPr>
+        <a:solidFill>
+          <a:srgbClr val="EEEBE4"/>
+        </a:solidFill>
+        <a:effectLst/>
+      </p:bgPr>
+    </p:bg>
+    <p:spTree>
+      <p:nvGrpSpPr>
+        <p:cNvPr id="1" name=""/>
+        <p:cNvGrpSpPr/>
+        <p:nvPr/>
+      </p:nvGrpSpPr>
+      <p:grpSpPr/>
+      <p:sp>
+        <p:nvSpPr>
+          <p:cNvPr id="2" name="Rectangle 1"/>
+          <p:cNvSpPr/>
+          <p:nvPr/>
+        </p:nvSpPr>
+        <p:spPr>
+          <a:xfrm>
+            <a:off x="0" y="0"/>
+            <a:ext cx="12191695" cy="384048"/>
+          </a:xfrm>
+          <a:prstGeom prst="rect">
+            <a:avLst/>
+          </a:prstGeom>
+          <a:solidFill>
+            <a:srgbClr val="0B2D5B"/>
+          </a:solidFill>
+          <a:ln>
+            <a:noFill/>
+          </a:ln>
+          <a:effectLst/>
+        </p:spPr>
+        <p:style>
+          <a:lnRef idx="1">
+            <a:schemeClr val="accent1"/>
+          </a:lnRef>
+          <a:fillRef idx="3">
+            <a:schemeClr val="accent1"/>
+          </a:fillRef>
+          <a:effectRef idx="2">
+            <a:schemeClr val="accent1"/>
+          </a:effectRef>
+          <a:fontRef idx="minor">
+            <a:schemeClr val="lt1"/>
+          </a:fontRef>
+        </p:style>
+        <p:txBody>
+          <a:bodyPr rtlCol="0" anchor="ctr"/>
+          <a:lstStyle/>
+          <a:p>
+            <a:pPr algn="ctr"/>
+          </a:p>
+        </p:txBody>
+      </p:sp>
+      <p:sp>
+        <p:nvSpPr>
+          <p:cNvPr id="3" name="TextBox 2"/>
+          <p:cNvSpPr txBox="1"/>
+          <p:nvPr/>
+        </p:nvSpPr>
+        <p:spPr>
+          <a:xfrm>
+            <a:off x="548640" y="100584"/>
+            <a:ext cx="10972800" cy="274320"/>
+          </a:xfrm>
+          <a:prstGeom prst="rect">
+            <a:avLst/>
+          </a:prstGeom>
+          <a:noFill/>
+        </p:spPr>
+        <p:txBody>
+          <a:bodyPr wrap="square" anchor="t" lIns="0" rIns="0" tIns="0" bIns="0">
+            <a:spAutoFit/>
+          </a:bodyPr>
+          <a:lstStyle/>
+          <a:p>
+            <a:pPr algn="l">
+              <a:spcAft>
+                <a:spcPts val="495"/>
+              </a:spcAft>
+            </a:pPr>
+            <a:r>
+              <a:rPr sz="1100" b="1" i="0">
+                <a:solidFill>
+                  <a:srgbClr val="FFFFFF"/>
+                </a:solidFill>
+                <a:latin typeface="Inter Tight"/>
+              </a:rPr>
+              <a:t>TEACHER PAGE  ·  skipped when you present  ·  Every student in the room</a:t>
+            </a:r>
+          </a:p>
+        </p:txBody>
+      </p:sp>
+      <p:sp>
+        <p:nvSpPr>
+          <p:cNvPr id="4" name="TextBox 3"/>
+          <p:cNvSpPr txBox="1"/>
+          <p:nvPr/>
+        </p:nvSpPr>
+        <p:spPr>
+          <a:xfrm>
+            <a:off x="548640" y="685800"/>
+            <a:ext cx="10972800" cy="640080"/>
+          </a:xfrm>
+          <a:prstGeom prst="rect">
+            <a:avLst/>
+          </a:prstGeom>
+          <a:noFill/>
+        </p:spPr>
+        <p:txBody>
+          <a:bodyPr wrap="square" anchor="t" lIns="0" rIns="0" tIns="0" bIns="0">
+            <a:spAutoFit/>
+          </a:bodyPr>
+          <a:lstStyle/>
+          <a:p>
+            <a:pPr algn="l">
+              <a:spcAft>
+                <a:spcPts val="1350"/>
+              </a:spcAft>
+            </a:pPr>
+            <a:r>
+              <a:rPr sz="3000" b="1" i="0">
+                <a:solidFill>
+                  <a:srgbClr val="1C1B19"/>
+                </a:solidFill>
+                <a:latin typeface="Source Serif 4"/>
+              </a:rPr>
+              <a:t>Every student in the room</a:t>
+            </a:r>
+          </a:p>
+        </p:txBody>
+      </p:sp>
+      <p:sp>
+        <p:nvSpPr>
+          <p:cNvPr id="5" name="TextBox 4"/>
+          <p:cNvSpPr txBox="1"/>
+          <p:nvPr/>
+        </p:nvSpPr>
+        <p:spPr>
+          <a:xfrm>
+            <a:off x="548640" y="1325880"/>
+            <a:ext cx="10972800" cy="365760"/>
+          </a:xfrm>
+          <a:prstGeom prst="rect">
+            <a:avLst/>
+          </a:prstGeom>
+          <a:noFill/>
+        </p:spPr>
+        <p:txBody>
+          <a:bodyPr wrap="square" anchor="t" lIns="0" rIns="0" tIns="0" bIns="0">
+            <a:spAutoFit/>
+          </a:bodyPr>
+          <a:lstStyle/>
+          <a:p>
+            <a:pPr algn="l">
+              <a:spcAft>
+                <a:spcPts val="630"/>
+              </a:spcAft>
+            </a:pPr>
+            <a:r>
+              <a:rPr sz="1400" b="0" i="0">
+                <a:solidFill>
+                  <a:srgbClr val="5D5A54"/>
+                </a:solidFill>
+                <a:latin typeface="Inter Tight"/>
+              </a:rPr>
+              <a:t>Culture, family, identity, ability and money: what to keep in mind for this topic.</a:t>
+            </a:r>
+          </a:p>
+        </p:txBody>
+      </p:sp>
+      <p:sp>
+        <p:nvSpPr>
+          <p:cNvPr id="6" name="TextBox 5"/>
+          <p:cNvSpPr txBox="1"/>
+          <p:nvPr/>
+        </p:nvSpPr>
+        <p:spPr>
+          <a:xfrm>
+            <a:off x="548640" y="1828800"/>
+            <a:ext cx="5394960" cy="4572000"/>
+          </a:xfrm>
+          <a:prstGeom prst="rect">
+            <a:avLst/>
+          </a:prstGeom>
+          <a:noFill/>
+        </p:spPr>
+        <p:txBody>
+          <a:bodyPr wrap="square" anchor="t" lIns="0" rIns="0" tIns="0" bIns="0">
+            <a:spAutoFit/>
+          </a:bodyPr>
+          <a:lstStyle/>
+          <a:p>
+            <a:pPr algn="l">
+              <a:spcAft>
+                <a:spcPts val="585"/>
+              </a:spcAft>
+            </a:pPr>
+            <a:r>
+              <a:rPr sz="1500" b="1" i="0">
+                <a:solidFill>
+                  <a:srgbClr val="1C1B19"/>
+                </a:solidFill>
+                <a:latin typeface="Source Serif 4"/>
+              </a:rPr>
+              <a:t>First to go to college, or carrying a family's sacrifice.</a:t>
+            </a:r>
+          </a:p>
+          <a:p>
+            <a:pPr algn="l">
+              <a:spcAft>
+                <a:spcPts val="585"/>
+              </a:spcAft>
+            </a:pPr>
+            <a:r>
+              <a:rPr sz="1300" b="0" i="0">
+                <a:solidFill>
+                  <a:srgbClr val="1C1B19"/>
+                </a:solidFill>
+                <a:latin typeface="Source Serif 4"/>
+              </a:rPr>
+              <a:t>For some students a grade holds a family's move to this country, years of hard work, or being the first to go to college. Honor that. Present "talk about how much you're carrying" as an option, never as pushing back on family.</a:t>
+            </a:r>
+          </a:p>
+          <a:p>
+            <a:pPr algn="l">
+              <a:spcAft>
+                <a:spcPts val="585"/>
+              </a:spcAft>
+            </a:pPr>
+            <a:r>
+              <a:rPr sz="1300" b="0" i="0">
+                <a:solidFill>
+                  <a:srgbClr val="1C1B19"/>
+                </a:solidFill>
+                <a:latin typeface="Source Serif 4"/>
+              </a:rPr>
+              <a:t/>
+            </a:r>
+          </a:p>
+          <a:p>
+            <a:pPr algn="l">
+              <a:spcAft>
+                <a:spcPts val="585"/>
+              </a:spcAft>
+            </a:pPr>
+            <a:r>
+              <a:rPr sz="1500" b="1" i="0">
+                <a:solidFill>
+                  <a:srgbClr val="1C1B19"/>
+                </a:solidFill>
+                <a:latin typeface="Source Serif 4"/>
+              </a:rPr>
+              <a:t>One of the only people like you in the class.</a:t>
+            </a:r>
+          </a:p>
+          <a:p>
+            <a:pPr algn="l">
+              <a:spcAft>
+                <a:spcPts val="585"/>
+              </a:spcAft>
+            </a:pPr>
+            <a:r>
+              <a:rPr sz="1300" b="0" i="0">
+                <a:solidFill>
+                  <a:srgbClr val="1C1B19"/>
+                </a:solidFill>
+                <a:latin typeface="Source Serif 4"/>
+              </a:rPr>
+              <a:t>Students of color, and others who feel watched in advanced classes, may feel a mistake reflects on more than themselves. Name that pressure as real and partly outside their control, and keep the done line about what is in their control.</a:t>
+            </a:r>
+          </a:p>
+          <a:p>
+            <a:pPr algn="l">
+              <a:spcAft>
+                <a:spcPts val="585"/>
+              </a:spcAft>
+            </a:pPr>
+            <a:r>
+              <a:rPr sz="1300" b="0" i="0">
+                <a:solidFill>
+                  <a:srgbClr val="1C1B19"/>
+                </a:solidFill>
+                <a:latin typeface="Source Serif 4"/>
+              </a:rPr>
+              <a:t/>
+            </a:r>
+          </a:p>
+          <a:p>
+            <a:pPr algn="l">
+              <a:spcAft>
+                <a:spcPts val="585"/>
+              </a:spcAft>
+            </a:pPr>
+            <a:r>
+              <a:rPr sz="1500" b="1" i="0">
+                <a:solidFill>
+                  <a:srgbClr val="1C1B19"/>
+                </a:solidFill>
+                <a:latin typeface="Source Serif 4"/>
+              </a:rPr>
+              <a:t>Expectations come from different adults.</a:t>
+            </a:r>
+          </a:p>
+          <a:p>
+            <a:pPr algn="l">
+              <a:spcAft>
+                <a:spcPts val="585"/>
+              </a:spcAft>
+            </a:pPr>
+            <a:r>
+              <a:rPr sz="1300" b="0" i="0">
+                <a:solidFill>
+                  <a:srgbClr val="1C1B19"/>
+                </a:solidFill>
+                <a:latin typeface="Source Serif 4"/>
+              </a:rPr>
+              <a:t>The "have to" voice might belong to a single parent, a grandparent, an older sibling, a coach, or the student. Say "the adults in your life" or "family" rather than "your parents."</a:t>
+            </a:r>
+          </a:p>
+          <a:p>
+            <a:pPr algn="l">
+              <a:spcAft>
+                <a:spcPts val="585"/>
+              </a:spcAft>
+            </a:pPr>
+            <a:r>
+              <a:rPr sz="1300" b="0" i="0">
+                <a:solidFill>
+                  <a:srgbClr val="1C1B19"/>
+                </a:solidFill>
+                <a:latin typeface="Source Serif 4"/>
+              </a:rPr>
+              <a:t/>
+            </a:r>
+          </a:p>
+        </p:txBody>
+      </p:sp>
+      <p:sp>
+        <p:nvSpPr>
+          <p:cNvPr id="7" name="TextBox 6"/>
+          <p:cNvSpPr txBox="1"/>
+          <p:nvPr/>
+        </p:nvSpPr>
+        <p:spPr>
+          <a:xfrm>
+            <a:off x="6217920" y="1828800"/>
+            <a:ext cx="5394960" cy="4572000"/>
+          </a:xfrm>
+          <a:prstGeom prst="rect">
+            <a:avLst/>
+          </a:prstGeom>
+          <a:noFill/>
+        </p:spPr>
+        <p:txBody>
+          <a:bodyPr wrap="square" anchor="t" lIns="0" rIns="0" tIns="0" bIns="0">
+            <a:spAutoFit/>
+          </a:bodyPr>
+          <a:lstStyle/>
+          <a:p>
+            <a:pPr algn="l">
+              <a:spcAft>
+                <a:spcPts val="585"/>
+              </a:spcAft>
+            </a:pPr>
+            <a:r>
+              <a:rPr sz="1500" b="1" i="0">
+                <a:solidFill>
+                  <a:srgbClr val="1C1B19"/>
+                </a:solidFill>
+                <a:latin typeface="Source Serif 4"/>
+              </a:rPr>
+              <a:t>Learning differences and attention.</a:t>
+            </a:r>
+          </a:p>
+          <a:p>
+            <a:pPr algn="l">
+              <a:spcAft>
+                <a:spcPts val="585"/>
+              </a:spcAft>
+            </a:pPr>
+            <a:r>
+              <a:rPr sz="1300" b="0" i="0">
+                <a:solidFill>
+                  <a:srgbClr val="1C1B19"/>
+                </a:solidFill>
+                <a:latin typeface="Source Serif 4"/>
+              </a:rPr>
+              <a:t>Students with a learning plan, ADHD, or slower processing may already spend longer on everything, so a time limit can feel unfair. Let them define what finished looks like first and set the time second. Avoid calling anyone "so OCD" about their work.</a:t>
+            </a:r>
+          </a:p>
+          <a:p>
+            <a:pPr algn="l">
+              <a:spcAft>
+                <a:spcPts val="585"/>
+              </a:spcAft>
+            </a:pPr>
+            <a:r>
+              <a:rPr sz="1300" b="0" i="0">
+                <a:solidFill>
+                  <a:srgbClr val="1C1B19"/>
+                </a:solidFill>
+                <a:latin typeface="Source Serif 4"/>
+              </a:rPr>
+              <a:t/>
+            </a:r>
+          </a:p>
+          <a:p>
+            <a:pPr algn="l">
+              <a:spcAft>
+                <a:spcPts val="585"/>
+              </a:spcAft>
+            </a:pPr>
+            <a:r>
+              <a:rPr sz="1500" b="1" i="0">
+                <a:solidFill>
+                  <a:srgbClr val="1C1B19"/>
+                </a:solidFill>
+                <a:latin typeface="Source Serif 4"/>
+              </a:rPr>
+              <a:t>Time and money aren't equal.</a:t>
+            </a:r>
+          </a:p>
+          <a:p>
+            <a:pPr algn="l">
+              <a:spcAft>
+                <a:spcPts val="585"/>
+              </a:spcAft>
+            </a:pPr>
+            <a:r>
+              <a:rPr sz="1300" b="0" i="0">
+                <a:solidFill>
+                  <a:srgbClr val="1C1B19"/>
+                </a:solidFill>
+                <a:latin typeface="Source Serif 4"/>
+              </a:rPr>
+              <a:t>Some students work a job, care for siblings, or can't pay for a tutor. Office hours and asking a teacher are free. Don't treat a summer internship or paid program as the standard; Amara's card is one example among many.</a:t>
+            </a:r>
+          </a:p>
+          <a:p>
+            <a:pPr algn="l">
+              <a:spcAft>
+                <a:spcPts val="585"/>
+              </a:spcAft>
+            </a:pPr>
+            <a:r>
+              <a:rPr sz="1300" b="0" i="0">
+                <a:solidFill>
+                  <a:srgbClr val="1C1B19"/>
+                </a:solidFill>
+                <a:latin typeface="Source Serif 4"/>
+              </a:rPr>
+              <a:t/>
+            </a:r>
+          </a:p>
+          <a:p>
+            <a:pPr algn="l">
+              <a:spcAft>
+                <a:spcPts val="585"/>
+              </a:spcAft>
+            </a:pPr>
+            <a:r>
+              <a:rPr sz="1500" b="1" i="0">
+                <a:solidFill>
+                  <a:srgbClr val="1C1B19"/>
+                </a:solidFill>
+                <a:latin typeface="Source Serif 4"/>
+              </a:rPr>
+              <a:t>Gender expectations.</a:t>
+            </a:r>
+          </a:p>
+          <a:p>
+            <a:pPr algn="l">
+              <a:spcAft>
+                <a:spcPts val="585"/>
+              </a:spcAft>
+            </a:pPr>
+            <a:r>
+              <a:rPr sz="1300" b="0" i="0">
+                <a:solidFill>
+                  <a:srgbClr val="1C1B19"/>
+                </a:solidFill>
+                <a:latin typeface="Source Serif 4"/>
+              </a:rPr>
+              <a:t>Some students feel they have to look flawless, and others feel they have to look effortless and never show they tried. Both come from the fear side. Mix genders in your examples and don't treat either as a girls' or boys' problem.</a:t>
+            </a:r>
+          </a:p>
+          <a:p>
+            <a:pPr algn="l">
+              <a:spcAft>
+                <a:spcPts val="585"/>
+              </a:spcAft>
+            </a:pPr>
+            <a:r>
+              <a:rPr sz="1300" b="0" i="0">
+                <a:solidFill>
+                  <a:srgbClr val="1C1B19"/>
+                </a:solidFill>
+                <a:latin typeface="Source Serif 4"/>
+              </a:rPr>
+              <a:t/>
+            </a:r>
+          </a:p>
+        </p:txBody>
+      </p:sp>
+    </p:spTree>
+  </p:cSld>
+  <p:clrMapOvr>
+    <a:masterClrMapping/>
+  </p:clrMapOvr>
+</p:sld>
+</file>
+
+<file path=ppt/slides/slide12.xml><?xml version="1.0" encoding="utf-8"?>
+<p:sld xmlns:a="http://schemas.openxmlformats.org/drawingml/2006/main" xmlns:p="http://schemas.openxmlformats.org/presentationml/2006/main" xmlns:r="http://schemas.openxmlformats.org/officeDocument/2006/relationships" show="0">
+  <p:cSld>
+    <p:bg>
+      <p:bgPr>
+        <a:solidFill>
+          <a:srgbClr val="EEEBE4"/>
+        </a:solidFill>
+        <a:effectLst/>
+      </p:bgPr>
+    </p:bg>
+    <p:spTree>
+      <p:nvGrpSpPr>
+        <p:cNvPr id="1" name=""/>
+        <p:cNvGrpSpPr/>
+        <p:nvPr/>
+      </p:nvGrpSpPr>
+      <p:grpSpPr/>
+      <p:sp>
+        <p:nvSpPr>
+          <p:cNvPr id="2" name="Rectangle 1"/>
+          <p:cNvSpPr/>
+          <p:nvPr/>
+        </p:nvSpPr>
+        <p:spPr>
+          <a:xfrm>
+            <a:off x="0" y="0"/>
+            <a:ext cx="12191695" cy="384048"/>
+          </a:xfrm>
+          <a:prstGeom prst="rect">
+            <a:avLst/>
+          </a:prstGeom>
+          <a:solidFill>
+            <a:srgbClr val="0B2D5B"/>
+          </a:solidFill>
+          <a:ln>
+            <a:noFill/>
+          </a:ln>
+          <a:effectLst/>
+        </p:spPr>
+        <p:style>
+          <a:lnRef idx="1">
+            <a:schemeClr val="accent1"/>
+          </a:lnRef>
+          <a:fillRef idx="3">
+            <a:schemeClr val="accent1"/>
+          </a:fillRef>
+          <a:effectRef idx="2">
+            <a:schemeClr val="accent1"/>
+          </a:effectRef>
+          <a:fontRef idx="minor">
+            <a:schemeClr val="lt1"/>
+          </a:fontRef>
+        </p:style>
+        <p:txBody>
+          <a:bodyPr rtlCol="0" anchor="ctr"/>
+          <a:lstStyle/>
+          <a:p>
+            <a:pPr algn="ctr"/>
+          </a:p>
+        </p:txBody>
+      </p:sp>
+      <p:sp>
+        <p:nvSpPr>
+          <p:cNvPr id="3" name="TextBox 2"/>
+          <p:cNvSpPr txBox="1"/>
+          <p:nvPr/>
+        </p:nvSpPr>
+        <p:spPr>
+          <a:xfrm>
+            <a:off x="548640" y="100584"/>
+            <a:ext cx="10972800" cy="274320"/>
+          </a:xfrm>
+          <a:prstGeom prst="rect">
+            <a:avLst/>
+          </a:prstGeom>
+          <a:noFill/>
+        </p:spPr>
+        <p:txBody>
+          <a:bodyPr wrap="square" anchor="t" lIns="0" rIns="0" tIns="0" bIns="0">
+            <a:spAutoFit/>
+          </a:bodyPr>
+          <a:lstStyle/>
+          <a:p>
+            <a:pPr algn="l">
+              <a:spcAft>
+                <a:spcPts val="495"/>
+              </a:spcAft>
+            </a:pPr>
+            <a:r>
+              <a:rPr sz="1100" b="1" i="0">
+                <a:solidFill>
+                  <a:srgbClr val="FFFFFF"/>
+                </a:solidFill>
+                <a:latin typeface="Inter Tight"/>
+              </a:rPr>
+              <a:t>TEACHER PAGE  ·  skipped when you present  ·  Background</a:t>
+            </a:r>
+          </a:p>
+        </p:txBody>
+      </p:sp>
+      <p:sp>
+        <p:nvSpPr>
+          <p:cNvPr id="4" name="TextBox 3"/>
+          <p:cNvSpPr txBox="1"/>
+          <p:nvPr/>
+        </p:nvSpPr>
+        <p:spPr>
+          <a:xfrm>
+            <a:off x="548640" y="685800"/>
+            <a:ext cx="10972800" cy="640080"/>
+          </a:xfrm>
+          <a:prstGeom prst="rect">
+            <a:avLst/>
+          </a:prstGeom>
+          <a:noFill/>
+        </p:spPr>
+        <p:txBody>
+          <a:bodyPr wrap="square" anchor="t" lIns="0" rIns="0" tIns="0" bIns="0">
+            <a:spAutoFit/>
+          </a:bodyPr>
+          <a:lstStyle/>
+          <a:p>
+            <a:pPr algn="l">
+              <a:spcAft>
+                <a:spcPts val="1350"/>
+              </a:spcAft>
+            </a:pPr>
+            <a:r>
+              <a:rPr sz="3000" b="1" i="0">
+                <a:solidFill>
+                  <a:srgbClr val="1C1B19"/>
+                </a:solidFill>
+                <a:latin typeface="Source Serif 4"/>
+              </a:rPr>
+              <a:t>What the research says</a:t>
+            </a:r>
+          </a:p>
+        </p:txBody>
+      </p:sp>
+      <p:sp>
+        <p:nvSpPr>
+          <p:cNvPr id="5" name="TextBox 4"/>
+          <p:cNvSpPr txBox="1"/>
+          <p:nvPr/>
+        </p:nvSpPr>
+        <p:spPr>
+          <a:xfrm>
+            <a:off x="548640" y="1463040"/>
+            <a:ext cx="5394960" cy="4937760"/>
+          </a:xfrm>
+          <a:prstGeom prst="rect">
+            <a:avLst/>
+          </a:prstGeom>
+          <a:noFill/>
+        </p:spPr>
+        <p:txBody>
+          <a:bodyPr wrap="square" anchor="t" lIns="0" rIns="0" tIns="0" bIns="0">
+            <a:spAutoFit/>
+          </a:bodyPr>
+          <a:lstStyle/>
+          <a:p>
+            <a:pPr algn="l">
+              <a:spcAft>
+                <a:spcPts val="585"/>
+              </a:spcAft>
+            </a:pPr>
+            <a:r>
+              <a:rPr sz="1300" b="0" i="0">
+                <a:solidFill>
+                  <a:srgbClr val="1C1B19"/>
+                </a:solidFill>
+                <a:latin typeface="Source Serif 4"/>
+              </a:rPr>
+              <a:t>Researchers split perfectionism into strivings (high standards and hard work) and concerns (fear of mistakes, doubt, and the sense that people only accept you if you're flawless). Later studies support parts of this model, not all of it.</a:t>
+            </a:r>
+          </a:p>
+          <a:p>
+            <a:pPr algn="l">
+              <a:spcAft>
+                <a:spcPts val="585"/>
+              </a:spcAft>
+            </a:pPr>
+            <a:r>
+              <a:rPr sz="1050" b="0" i="0">
+                <a:solidFill>
+                  <a:srgbClr val="5D5A54"/>
+                </a:solidFill>
+                <a:latin typeface="Inter Tight"/>
+              </a:rPr>
+              <a:t>Gaudreau and Thompson, Personality and Individual Differences, 2010</a:t>
+            </a:r>
+          </a:p>
+          <a:p>
+            <a:pPr algn="l">
+              <a:spcAft>
+                <a:spcPts val="585"/>
+              </a:spcAft>
+            </a:pPr>
+            <a:r>
+              <a:rPr sz="1300" b="0" i="0">
+                <a:solidFill>
+                  <a:srgbClr val="1C1B19"/>
+                </a:solidFill>
+                <a:latin typeface="Source Serif 4"/>
+              </a:rPr>
+              <a:t>On their own, high personal standards tend to go with motivation and good outcomes.</a:t>
+            </a:r>
+          </a:p>
+          <a:p>
+            <a:pPr algn="l">
+              <a:spcAft>
+                <a:spcPts val="585"/>
+              </a:spcAft>
+            </a:pPr>
+            <a:r>
+              <a:rPr sz="1050" b="0" i="0">
+                <a:solidFill>
+                  <a:srgbClr val="5D5A54"/>
+                </a:solidFill>
+                <a:latin typeface="Inter Tight"/>
+              </a:rPr>
+              <a:t>Stoeber and Otto, Personality and Social Psychology Review, 2006</a:t>
+            </a:r>
+          </a:p>
+          <a:p>
+            <a:pPr algn="l">
+              <a:spcAft>
+                <a:spcPts val="585"/>
+              </a:spcAft>
+            </a:pPr>
+            <a:r>
+              <a:rPr sz="1300" b="0" i="0">
+                <a:solidFill>
+                  <a:srgbClr val="1C1B19"/>
+                </a:solidFill>
+                <a:latin typeface="Source Serif 4"/>
+              </a:rPr>
+              <a:t>Socially prescribed perfectionism, the belief that other people demand perfection from you, is one of three types, along with perfectionism aimed at yourself and at others.</a:t>
+            </a:r>
+          </a:p>
+          <a:p>
+            <a:pPr algn="l">
+              <a:spcAft>
+                <a:spcPts val="585"/>
+              </a:spcAft>
+            </a:pPr>
+            <a:r>
+              <a:rPr sz="1050" b="0" i="0">
+                <a:solidFill>
+                  <a:srgbClr val="5D5A54"/>
+                </a:solidFill>
+                <a:latin typeface="Inter Tight"/>
+              </a:rPr>
+              <a:t>Hewitt and Flett, Journal of Personality and Social Psychology, 1991</a:t>
+            </a:r>
+          </a:p>
+        </p:txBody>
+      </p:sp>
+      <p:sp>
+        <p:nvSpPr>
+          <p:cNvPr id="6" name="TextBox 5"/>
+          <p:cNvSpPr txBox="1"/>
+          <p:nvPr/>
+        </p:nvSpPr>
+        <p:spPr>
+          <a:xfrm>
+            <a:off x="6217920" y="1463040"/>
+            <a:ext cx="5394960" cy="4937760"/>
+          </a:xfrm>
+          <a:prstGeom prst="rect">
+            <a:avLst/>
+          </a:prstGeom>
+          <a:noFill/>
+        </p:spPr>
+        <p:txBody>
+          <a:bodyPr wrap="square" anchor="t" lIns="0" rIns="0" tIns="0" bIns="0">
+            <a:spAutoFit/>
+          </a:bodyPr>
+          <a:lstStyle/>
+          <a:p>
+            <a:pPr algn="l">
+              <a:spcAft>
+                <a:spcPts val="585"/>
+              </a:spcAft>
+            </a:pPr>
+            <a:r>
+              <a:rPr sz="1300" b="0" i="0">
+                <a:solidFill>
+                  <a:srgbClr val="1C1B19"/>
+                </a:solidFill>
+                <a:latin typeface="Source Serif 4"/>
+              </a:rPr>
+              <a:t>Across 41,641 college students in the U.S., Canada and the U.K. from 1989 to 2016, all three types of perfectionism rose. The sense that others demand perfection rose most, by about 33%.</a:t>
+            </a:r>
+          </a:p>
+          <a:p>
+            <a:pPr algn="l">
+              <a:spcAft>
+                <a:spcPts val="585"/>
+              </a:spcAft>
+            </a:pPr>
+            <a:r>
+              <a:rPr sz="1050" b="0" i="0">
+                <a:solidFill>
+                  <a:srgbClr val="5D5A54"/>
+                </a:solidFill>
+                <a:latin typeface="Inter Tight"/>
+              </a:rPr>
+              <a:t>Curran and Hill, Psychological Bulletin, 2019</a:t>
+            </a:r>
+          </a:p>
+          <a:p>
+            <a:pPr algn="l">
+              <a:spcAft>
+                <a:spcPts val="585"/>
+              </a:spcAft>
+            </a:pPr>
+            <a:r>
+              <a:rPr sz="1300" b="0" i="0">
+                <a:solidFill>
+                  <a:srgbClr val="1C1B19"/>
+                </a:solidFill>
+                <a:latin typeface="Source Serif 4"/>
+              </a:rPr>
+              <a:t>Students' sense of their parents' expectations and criticism also rose over those decades and tracked with perfectionism. It's a correlation; the authors point to more competitive, higher-stakes environments.</a:t>
+            </a:r>
+          </a:p>
+          <a:p>
+            <a:pPr algn="l">
+              <a:spcAft>
+                <a:spcPts val="585"/>
+              </a:spcAft>
+            </a:pPr>
+            <a:r>
+              <a:rPr sz="1050" b="0" i="0">
+                <a:solidFill>
+                  <a:srgbClr val="5D5A54"/>
+                </a:solidFill>
+                <a:latin typeface="Inter Tight"/>
+              </a:rPr>
+              <a:t>Curran and Hill, Psychological Bulletin, 2022</a:t>
+            </a:r>
+          </a:p>
+          <a:p>
+            <a:pPr algn="l">
+              <a:spcAft>
+                <a:spcPts val="585"/>
+              </a:spcAft>
+            </a:pPr>
+            <a:r>
+              <a:rPr sz="1300" b="0" i="0">
+                <a:solidFill>
+                  <a:srgbClr val="1C1B19"/>
+                </a:solidFill>
+                <a:latin typeface="Source Serif 4"/>
+              </a:rPr>
+              <a:t>A review of 284 studies linked perfectionism to depression, anxiety, OCD, eating disorders and self-harm, which is why therapists treat it as a risk factor across many problems.</a:t>
+            </a:r>
+          </a:p>
+          <a:p>
+            <a:pPr algn="l">
+              <a:spcAft>
+                <a:spcPts val="585"/>
+              </a:spcAft>
+            </a:pPr>
+            <a:r>
+              <a:rPr sz="1050" b="0" i="0">
+                <a:solidFill>
+                  <a:srgbClr val="5D5A54"/>
+                </a:solidFill>
+                <a:latin typeface="Inter Tight"/>
+              </a:rPr>
+              <a:t>Limburg, Watson, Hagger and Egan, Journal of Clinical Psychology, 2017</a:t>
+            </a:r>
+          </a:p>
+        </p:txBody>
+      </p:sp>
+    </p:spTree>
+  </p:cSld>
+  <p:clrMapOvr>
+    <a:masterClrMapping/>
+  </p:clrMapOvr>
+</p:sld>
+</file>
+
+<file path=ppt/slides/slide2.xml><?xml version="1.0" encoding="utf-8"?>
+<p:sld xmlns:a="http://schemas.openxmlformats.org/drawingml/2006/main" xmlns:p="http://schemas.openxmlformats.org/presentationml/2006/main" xmlns:r="http://schemas.openxmlformats.org/officeDocument/2006/relationships">
+  <p:cSld>
+    <p:bg>
+      <p:bgPr>
+        <a:solidFill>
+          <a:srgbClr val="0B2D5B"/>
+        </a:solidFill>
+        <a:effectLst/>
+      </p:bgPr>
+    </p:bg>
+    <p:spTree>
+      <p:nvGrpSpPr>
+        <p:cNvPr id="1" name=""/>
+        <p:cNvGrpSpPr/>
+        <p:nvPr/>
+      </p:nvGrpSpPr>
+      <p:grpSpPr/>
+      <p:sp>
+        <p:nvSpPr>
+          <p:cNvPr id="2" name="Rectangle 1"/>
+          <p:cNvSpPr/>
+          <p:nvPr/>
+        </p:nvSpPr>
+        <p:spPr>
+          <a:xfrm>
+            <a:off x="548640" y="502920"/>
+            <a:ext cx="457200" cy="54864"/>
+          </a:xfrm>
+          <a:prstGeom prst="rect">
+            <a:avLst/>
+          </a:prstGeom>
+          <a:solidFill>
+            <a:srgbClr val="F47B20"/>
+          </a:solidFill>
+          <a:ln>
+            <a:noFill/>
+          </a:ln>
+          <a:effectLst/>
+        </p:spPr>
+        <p:style>
+          <a:lnRef idx="1">
+            <a:schemeClr val="accent1"/>
+          </a:lnRef>
+          <a:fillRef idx="3">
+            <a:schemeClr val="accent1"/>
+          </a:fillRef>
+          <a:effectRef idx="2">
+            <a:schemeClr val="accent1"/>
+          </a:effectRef>
+          <a:fontRef idx="minor">
+            <a:schemeClr val="lt1"/>
+          </a:fontRef>
+        </p:style>
+        <p:txBody>
+          <a:bodyPr rtlCol="0" anchor="ctr"/>
+          <a:lstStyle/>
+          <a:p>
+            <a:pPr algn="ctr"/>
+          </a:p>
+        </p:txBody>
+      </p:sp>
+      <p:sp>
+        <p:nvSpPr>
+          <p:cNvPr id="3" name="TextBox 2"/>
+          <p:cNvSpPr txBox="1"/>
+          <p:nvPr/>
+        </p:nvSpPr>
+        <p:spPr>
+          <a:xfrm>
+            <a:off x="1143000" y="393192"/>
+            <a:ext cx="8229600" cy="274320"/>
+          </a:xfrm>
+          <a:prstGeom prst="rect">
+            <a:avLst/>
+          </a:prstGeom>
+          <a:noFill/>
+        </p:spPr>
+        <p:txBody>
+          <a:bodyPr wrap="square" anchor="t" lIns="0" rIns="0" tIns="0" bIns="0">
+            <a:spAutoFit/>
+          </a:bodyPr>
+          <a:lstStyle/>
+          <a:p>
+            <a:pPr algn="l">
+              <a:spcAft>
+                <a:spcPts val="540"/>
+              </a:spcAft>
+            </a:pPr>
+            <a:r>
+              <a:rPr sz="1200" b="1" i="0">
+                <a:solidFill>
+                  <a:srgbClr val="5D5A54"/>
+                </a:solidFill>
+                <a:latin typeface="Inter Tight"/>
+              </a:rPr>
+              <a:t>PERFECT IS A TRAP</a:t>
+            </a:r>
+          </a:p>
+        </p:txBody>
+      </p:sp>
+      <p:sp>
+        <p:nvSpPr>
+          <p:cNvPr id="4" name="TextBox 3"/>
+          <p:cNvSpPr txBox="1"/>
+          <p:nvPr/>
+        </p:nvSpPr>
+        <p:spPr>
+          <a:xfrm>
+            <a:off x="8229600" y="6400800"/>
+            <a:ext cx="3410712" cy="274320"/>
+          </a:xfrm>
+          <a:prstGeom prst="rect">
+            <a:avLst/>
+          </a:prstGeom>
+          <a:noFill/>
+        </p:spPr>
+        <p:txBody>
+          <a:bodyPr wrap="square" anchor="t" lIns="0" rIns="0" tIns="0" bIns="0">
+            <a:spAutoFit/>
+          </a:bodyPr>
+          <a:lstStyle/>
+          <a:p>
+            <a:pPr algn="r">
+              <a:spcAft>
+                <a:spcPts val="450"/>
+              </a:spcAft>
+            </a:pPr>
+            <a:r>
+              <a:rPr sz="1000" b="0" i="0">
+                <a:solidFill>
+                  <a:srgbClr val="5D5A54"/>
+                </a:solidFill>
+                <a:latin typeface="Inter Tight"/>
+              </a:rPr>
+              <a:t>Beaver Counseling</a:t>
+            </a:r>
+          </a:p>
+        </p:txBody>
+      </p:sp>
+      <p:sp>
+        <p:nvSpPr>
+          <p:cNvPr id="5" name="TextBox 4"/>
+          <p:cNvSpPr txBox="1"/>
+          <p:nvPr/>
+        </p:nvSpPr>
+        <p:spPr>
+          <a:xfrm>
+            <a:off x="822960" y="2011680"/>
+            <a:ext cx="10515600" cy="1463040"/>
+          </a:xfrm>
+          <a:prstGeom prst="rect">
+            <a:avLst/>
+          </a:prstGeom>
+          <a:noFill/>
+        </p:spPr>
+        <p:txBody>
+          <a:bodyPr wrap="square" anchor="b" lIns="0" rIns="0" tIns="0" bIns="0">
+            <a:spAutoFit/>
+          </a:bodyPr>
+          <a:lstStyle/>
+          <a:p>
+            <a:pPr algn="l">
+              <a:spcAft>
+                <a:spcPts val="2700"/>
+              </a:spcAft>
+            </a:pPr>
+            <a:r>
+              <a:rPr sz="6000" b="1" i="0">
+                <a:solidFill>
+                  <a:srgbClr val="FFFFFF"/>
+                </a:solidFill>
+                <a:latin typeface="Source Serif 4"/>
+              </a:rPr>
+              <a:t>Perfect Is a Trap</a:t>
+            </a:r>
+          </a:p>
+        </p:txBody>
+      </p:sp>
+      <p:sp>
+        <p:nvSpPr>
+          <p:cNvPr id="6" name="TextBox 5"/>
+          <p:cNvSpPr txBox="1"/>
+          <p:nvPr/>
+        </p:nvSpPr>
+        <p:spPr>
+          <a:xfrm>
+            <a:off x="822960" y="3611880"/>
+            <a:ext cx="10515600" cy="914400"/>
+          </a:xfrm>
+          <a:prstGeom prst="rect">
+            <a:avLst/>
+          </a:prstGeom>
+          <a:noFill/>
+        </p:spPr>
+        <p:txBody>
+          <a:bodyPr wrap="square" anchor="t" lIns="0" rIns="0" tIns="0" bIns="0">
+            <a:spAutoFit/>
+          </a:bodyPr>
+          <a:lstStyle/>
+          <a:p>
+            <a:pPr algn="l">
+              <a:spcAft>
+                <a:spcPts val="1080"/>
+              </a:spcAft>
+            </a:pPr>
+            <a:r>
+              <a:rPr sz="2400" b="0" i="1">
+                <a:solidFill>
+                  <a:srgbClr val="E8E4DA"/>
+                </a:solidFill>
+                <a:latin typeface="Source Serif 4"/>
+              </a:rPr>
+              <a:t>Keep the high bar. Drop the part that hurts.</a:t>
+            </a:r>
+          </a:p>
+        </p:txBody>
+      </p:sp>
+      <p:sp>
+        <p:nvSpPr>
+          <p:cNvPr id="7" name="TextBox 6"/>
+          <p:cNvSpPr txBox="1"/>
+          <p:nvPr/>
+        </p:nvSpPr>
+        <p:spPr>
+          <a:xfrm>
+            <a:off x="822960" y="6035040"/>
+            <a:ext cx="7315200" cy="365760"/>
+          </a:xfrm>
+          <a:prstGeom prst="rect">
+            <a:avLst/>
+          </a:prstGeom>
+          <a:noFill/>
+        </p:spPr>
+        <p:txBody>
+          <a:bodyPr wrap="square" anchor="t" lIns="0" rIns="0" tIns="0" bIns="0">
+            <a:spAutoFit/>
+          </a:bodyPr>
+          <a:lstStyle/>
+          <a:p>
+            <a:pPr algn="l">
+              <a:spcAft>
+                <a:spcPts val="585"/>
+              </a:spcAft>
+            </a:pPr>
+            <a:r>
+              <a:rPr sz="1300" b="0" i="0">
+                <a:solidFill>
+                  <a:srgbClr val="E8E4DA"/>
+                </a:solidFill>
+                <a:latin typeface="Inter Tight"/>
+              </a:rPr>
+              <a:t>Beaver Upper School · Counseling</a:t>
+            </a:r>
+          </a:p>
+        </p:txBody>
+      </p:sp>
+    </p:spTree>
+  </p:cSld>
+  <p:clrMapOvr>
+    <a:masterClrMapping/>
+  </p:clrMapOvr>
+</p:sld>
+</file>
+
+<file path=ppt/slides/slide3.xml><?xml version="1.0" encoding="utf-8"?>
 <p:sld xmlns:a="http://schemas.openxmlformats.org/drawingml/2006/main" xmlns:p="http://schemas.openxmlformats.org/presentationml/2006/main" xmlns:r="http://schemas.openxmlformats.org/officeDocument/2006/relationships">
   <p:cSld>
     <p:bg>
@@ -4628,7 +6109,7 @@
                 </a:solidFill>
                 <a:latin typeface="Inter Tight"/>
               </a:rPr>
-              <a:t>SET A DONE LINE</a:t>
+              <a:t>SOUND FAMILIAR?</a:t>
             </a:r>
           </a:p>
         </p:txBody>
@@ -4750,7 +6231,7 @@
                 </a:solidFill>
                 <a:latin typeface="Source Serif 4"/>
               </a:rPr>
-              <a:t>Pick one thing you can't seem to finish.</a:t>
+              <a:t>Stand up if this has happened to you this year.</a:t>
             </a:r>
           </a:p>
         </p:txBody>
@@ -4789,7 +6270,7 @@
                 </a:solidFill>
                 <a:latin typeface="Inter Tight"/>
               </a:rPr>
-              <a:t>On a card, privately: what it's worth, what perfect would cost, and your done line.</a:t>
+              <a:t>Sit back down after each one. Staying seated is always fine.</a:t>
             </a:r>
           </a:p>
         </p:txBody>
@@ -4802,7 +6283,7 @@
 </p:sld>
 </file>
 
-<file path=ppt/slides/slide11.xml><?xml version="1.0" encoding="utf-8"?>
+<file path=ppt/slides/slide4.xml><?xml version="1.0" encoding="utf-8"?>
 <p:sld xmlns:a="http://schemas.openxmlformats.org/drawingml/2006/main" xmlns:p="http://schemas.openxmlformats.org/presentationml/2006/main" xmlns:r="http://schemas.openxmlformats.org/officeDocument/2006/relationships">
   <p:cSld>
     <p:bg>
@@ -4898,7 +6379,7 @@
                 </a:solidFill>
                 <a:latin typeface="Inter Tight"/>
               </a:rPr>
-              <a:t>BEFORE YOU GO</a:t>
+              <a:t>TWO PARTS</a:t>
             </a:r>
           </a:p>
         </p:txBody>
@@ -4950,7 +6431,7 @@
         </p:nvSpPr>
         <p:spPr>
           <a:xfrm>
-            <a:off x="822960" y="1188720"/>
+            <a:off x="822960" y="1005840"/>
             <a:ext cx="10515600" cy="914400"/>
           </a:xfrm>
           <a:prstGeom prst="rect">
@@ -4966,70 +6447,31 @@
           <a:p>
             <a:pPr algn="l">
               <a:spcAft>
-                <a:spcPts val="1620"/>
-              </a:spcAft>
-            </a:pPr>
-            <a:r>
-              <a:rPr sz="3600" b="1" i="0">
+                <a:spcPts val="1530"/>
+              </a:spcAft>
+            </a:pPr>
+            <a:r>
+              <a:rPr sz="3400" b="1" i="0">
                 <a:solidFill>
                   <a:srgbClr val="1C1B19"/>
                 </a:solidFill>
                 <a:latin typeface="Source Serif 4"/>
               </a:rPr>
-              <a:t>Try one mistake experiment, if you want</a:t>
-            </a:r>
-          </a:p>
-        </p:txBody>
-      </p:sp>
-      <p:sp>
-        <p:nvSpPr>
-          <p:cNvPr id="6" name="TextBox 5"/>
-          <p:cNvSpPr txBox="1"/>
-          <p:nvPr/>
-        </p:nvSpPr>
-        <p:spPr>
-          <a:xfrm>
-            <a:off x="822960" y="2286000"/>
-            <a:ext cx="10515600" cy="1463040"/>
-          </a:xfrm>
-          <a:prstGeom prst="rect">
-            <a:avLst/>
-          </a:prstGeom>
-          <a:noFill/>
-        </p:spPr>
-        <p:txBody>
-          <a:bodyPr wrap="square" anchor="t" lIns="0" rIns="0" tIns="0" bIns="0">
-            <a:spAutoFit/>
-          </a:bodyPr>
-          <a:lstStyle/>
-          <a:p>
-            <a:pPr algn="l">
-              <a:spcAft>
-                <a:spcPts val="1080"/>
-              </a:spcAft>
-            </a:pPr>
-            <a:r>
-              <a:rPr sz="2400" b="0" i="0">
-                <a:solidFill>
-                  <a:srgbClr val="1C1B19"/>
-                </a:solidFill>
-                <a:latin typeface="Source Serif 4"/>
-              </a:rPr>
-              <a:t>Send the email after one read. Turn in the draft without the fifth pass. Predict what will happen, then check.</a:t>
-            </a:r>
-          </a:p>
-        </p:txBody>
-      </p:sp>
-      <p:sp>
-        <p:nvSpPr>
-          <p:cNvPr id="7" name="Rectangle 6"/>
+              <a:t>Same standards. Different fuel.</a:t>
+            </a:r>
+          </a:p>
+        </p:txBody>
+      </p:sp>
+      <p:sp>
+        <p:nvSpPr>
+          <p:cNvPr id="6" name="Rectangle 5"/>
           <p:cNvSpPr/>
           <p:nvPr/>
         </p:nvSpPr>
         <p:spPr>
           <a:xfrm>
-            <a:off x="822960" y="4023360"/>
-            <a:ext cx="10515600" cy="1371600"/>
+            <a:off x="822960" y="2103120"/>
+            <a:ext cx="5120640" cy="3931920"/>
           </a:xfrm>
           <a:prstGeom prst="rect">
             <a:avLst/>
@@ -5039,7 +6481,7 @@
           </a:solidFill>
           <a:ln w="15875">
             <a:solidFill>
-              <a:srgbClr val="1C1B19"/>
+              <a:srgbClr val="D8D2C6"/>
             </a:solidFill>
           </a:ln>
           <a:effectLst/>
@@ -5068,14 +6510,14 @@
       </p:sp>
       <p:sp>
         <p:nvSpPr>
-          <p:cNvPr id="8" name="TextBox 7"/>
+          <p:cNvPr id="7" name="TextBox 6"/>
           <p:cNvSpPr txBox="1"/>
           <p:nvPr/>
         </p:nvSpPr>
         <p:spPr>
           <a:xfrm>
-            <a:off x="1097280" y="4206240"/>
-            <a:ext cx="10058400" cy="365760"/>
+            <a:off x="1097280" y="2286000"/>
+            <a:ext cx="4572000" cy="457200"/>
           </a:xfrm>
           <a:prstGeom prst="rect">
             <a:avLst/>
@@ -5090,31 +6532,31 @@
           <a:p>
             <a:pPr algn="l">
               <a:spcAft>
-                <a:spcPts val="540"/>
-              </a:spcAft>
-            </a:pPr>
-            <a:r>
-              <a:rPr sz="1200" b="1" i="0">
+                <a:spcPts val="585"/>
+              </a:spcAft>
+            </a:pPr>
+            <a:r>
+              <a:rPr sz="1300" b="1" i="0">
                 <a:solidFill>
                   <a:srgbClr val="0B2D5B"/>
                 </a:solidFill>
                 <a:latin typeface="Inter Tight"/>
               </a:rPr>
-              <a:t>STUDENT PAGE</a:t>
-            </a:r>
-          </a:p>
-        </p:txBody>
-      </p:sp>
-      <p:sp>
-        <p:nvSpPr>
-          <p:cNvPr id="9" name="TextBox 8"/>
+              <a:t>STRIVINGS: THE STANDARDS</a:t>
+            </a:r>
+          </a:p>
+        </p:txBody>
+      </p:sp>
+      <p:sp>
+        <p:nvSpPr>
+          <p:cNvPr id="8" name="TextBox 7"/>
           <p:cNvSpPr txBox="1"/>
           <p:nvPr/>
         </p:nvSpPr>
         <p:spPr>
           <a:xfrm>
-            <a:off x="1097280" y="4617720"/>
-            <a:ext cx="10058400" cy="640080"/>
+            <a:off x="1097280" y="2788920"/>
+            <a:ext cx="4572000" cy="3108960"/>
           </a:xfrm>
           <a:prstGeom prst="rect">
             <a:avLst/>
@@ -5129,66 +6571,90 @@
           <a:p>
             <a:pPr algn="l">
               <a:spcAft>
-                <a:spcPts val="900"/>
-              </a:spcAft>
-            </a:pPr>
-            <a:r>
-              <a:rPr sz="2000" b="0" i="0">
+                <a:spcPts val="855"/>
+              </a:spcAft>
+            </a:pPr>
+            <a:r>
+              <a:rPr sz="1900" b="0" i="0">
                 <a:solidFill>
                   <a:srgbClr val="1C1B19"/>
                 </a:solidFill>
-                <a:latin typeface="Inter Tight"/>
-              </a:rPr>
-              <a:t>https://rmwtoolkit.github.io/bcds-toolkit/perfect-is-a-trap-high-school.html</a:t>
-            </a:r>
-          </a:p>
-        </p:txBody>
-      </p:sp>
-    </p:spTree>
-  </p:cSld>
-  <p:clrMapOvr>
-    <a:masterClrMapping/>
-  </p:clrMapOvr>
-</p:sld>
-</file>
-
-<file path=ppt/slides/slide2.xml><?xml version="1.0" encoding="utf-8"?>
-<p:sld xmlns:a="http://schemas.openxmlformats.org/drawingml/2006/main" xmlns:p="http://schemas.openxmlformats.org/presentationml/2006/main" xmlns:r="http://schemas.openxmlformats.org/officeDocument/2006/relationships" show="0">
-  <p:cSld>
-    <p:bg>
-      <p:bgPr>
-        <a:solidFill>
-          <a:srgbClr val="EEEBE4"/>
-        </a:solidFill>
-        <a:effectLst/>
-      </p:bgPr>
-    </p:bg>
-    <p:spTree>
-      <p:nvGrpSpPr>
-        <p:cNvPr id="1" name=""/>
-        <p:cNvGrpSpPr/>
-        <p:nvPr/>
-      </p:nvGrpSpPr>
-      <p:grpSpPr/>
-      <p:sp>
-        <p:nvSpPr>
-          <p:cNvPr id="2" name="Rectangle 1"/>
+                <a:latin typeface="Source Serif 4"/>
+              </a:rPr>
+              <a:t>High goals</a:t>
+            </a:r>
+          </a:p>
+          <a:p>
+            <a:pPr algn="l">
+              <a:spcAft>
+                <a:spcPts val="855"/>
+              </a:spcAft>
+            </a:pPr>
+            <a:r>
+              <a:rPr sz="1900" b="0" i="0">
+                <a:solidFill>
+                  <a:srgbClr val="1C1B19"/>
+                </a:solidFill>
+                <a:latin typeface="Source Serif 4"/>
+              </a:rPr>
+              <a:t>Working hard toward them</a:t>
+            </a:r>
+          </a:p>
+          <a:p>
+            <a:pPr algn="l">
+              <a:spcAft>
+                <a:spcPts val="855"/>
+              </a:spcAft>
+            </a:pPr>
+            <a:r>
+              <a:rPr sz="1900" b="0" i="0">
+                <a:solidFill>
+                  <a:srgbClr val="1C1B19"/>
+                </a:solidFill>
+                <a:latin typeface="Source Serif 4"/>
+              </a:rPr>
+              <a:t>"I want to do well."</a:t>
+            </a:r>
+          </a:p>
+          <a:p>
+            <a:pPr algn="l">
+              <a:spcAft>
+                <a:spcPts val="855"/>
+              </a:spcAft>
+            </a:pPr>
+            <a:r>
+              <a:rPr sz="1900" b="0" i="0">
+                <a:solidFill>
+                  <a:srgbClr val="1C1B19"/>
+                </a:solidFill>
+                <a:latin typeface="Source Serif 4"/>
+              </a:rPr>
+              <a:t>Tends to go with motivation</a:t>
+            </a:r>
+          </a:p>
+        </p:txBody>
+      </p:sp>
+      <p:sp>
+        <p:nvSpPr>
+          <p:cNvPr id="9" name="Rectangle 8"/>
           <p:cNvSpPr/>
           <p:nvPr/>
         </p:nvSpPr>
         <p:spPr>
           <a:xfrm>
-            <a:off x="0" y="0"/>
-            <a:ext cx="12191695" cy="384048"/>
+            <a:off x="6309360" y="2103120"/>
+            <a:ext cx="5120640" cy="3931920"/>
           </a:xfrm>
           <a:prstGeom prst="rect">
             <a:avLst/>
           </a:prstGeom>
           <a:solidFill>
-            <a:srgbClr val="0B2D5B"/>
+            <a:srgbClr val="FFFFFF"/>
           </a:solidFill>
-          <a:ln>
-            <a:noFill/>
+          <a:ln w="15875">
+            <a:solidFill>
+              <a:srgbClr val="D8D2C6"/>
+            </a:solidFill>
           </a:ln>
           <a:effectLst/>
         </p:spPr>
@@ -5216,14 +6682,14 @@
       </p:sp>
       <p:sp>
         <p:nvSpPr>
-          <p:cNvPr id="3" name="TextBox 2"/>
+          <p:cNvPr id="10" name="TextBox 9"/>
           <p:cNvSpPr txBox="1"/>
           <p:nvPr/>
         </p:nvSpPr>
         <p:spPr>
           <a:xfrm>
-            <a:off x="548640" y="100584"/>
-            <a:ext cx="10972800" cy="274320"/>
+            <a:off x="6583680" y="2286000"/>
+            <a:ext cx="4572000" cy="457200"/>
           </a:xfrm>
           <a:prstGeom prst="rect">
             <a:avLst/>
@@ -5238,31 +6704,31 @@
           <a:p>
             <a:pPr algn="l">
               <a:spcAft>
-                <a:spcPts val="495"/>
-              </a:spcAft>
-            </a:pPr>
-            <a:r>
-              <a:rPr sz="1100" b="1" i="0">
-                <a:solidFill>
-                  <a:srgbClr val="FFFFFF"/>
+                <a:spcPts val="585"/>
+              </a:spcAft>
+            </a:pPr>
+            <a:r>
+              <a:rPr sz="1300" b="1" i="0">
+                <a:solidFill>
+                  <a:srgbClr val="0B2D5B"/>
                 </a:solidFill>
                 <a:latin typeface="Inter Tight"/>
               </a:rPr>
-              <a:t>TEACHER PAGE  ·  skipped when you present  ·  Before you teach</a:t>
-            </a:r>
-          </a:p>
-        </p:txBody>
-      </p:sp>
-      <p:sp>
-        <p:nvSpPr>
-          <p:cNvPr id="4" name="TextBox 3"/>
+              <a:t>CONCERNS: THE FEAR</a:t>
+            </a:r>
+          </a:p>
+        </p:txBody>
+      </p:sp>
+      <p:sp>
+        <p:nvSpPr>
+          <p:cNvPr id="11" name="TextBox 10"/>
           <p:cNvSpPr txBox="1"/>
           <p:nvPr/>
         </p:nvSpPr>
         <p:spPr>
           <a:xfrm>
-            <a:off x="548640" y="685800"/>
-            <a:ext cx="10972800" cy="640080"/>
+            <a:off x="6583680" y="2788920"/>
+            <a:ext cx="4572000" cy="3108960"/>
           </a:xfrm>
           <a:prstGeom prst="rect">
             <a:avLst/>
@@ -5277,351 +6743,65 @@
           <a:p>
             <a:pPr algn="l">
               <a:spcAft>
-                <a:spcPts val="1350"/>
-              </a:spcAft>
-            </a:pPr>
-            <a:r>
-              <a:rPr sz="3000" b="1" i="0">
+                <a:spcPts val="855"/>
+              </a:spcAft>
+            </a:pPr>
+            <a:r>
+              <a:rPr sz="1900" b="0" i="0">
                 <a:solidFill>
                   <a:srgbClr val="1C1B19"/>
                 </a:solidFill>
                 <a:latin typeface="Source Serif 4"/>
               </a:rPr>
-              <a:t>Before you teach</a:t>
-            </a:r>
-          </a:p>
-        </p:txBody>
-      </p:sp>
-      <p:sp>
-        <p:nvSpPr>
-          <p:cNvPr id="5" name="TextBox 4"/>
-          <p:cNvSpPr txBox="1"/>
-          <p:nvPr/>
-        </p:nvSpPr>
-        <p:spPr>
-          <a:xfrm>
-            <a:off x="548640" y="1463040"/>
-            <a:ext cx="5394960" cy="4937760"/>
-          </a:xfrm>
-          <a:prstGeom prst="rect">
-            <a:avLst/>
-          </a:prstGeom>
-          <a:noFill/>
-        </p:spPr>
-        <p:txBody>
-          <a:bodyPr wrap="square" anchor="t" lIns="0" rIns="0" tIns="0" bIns="0">
-            <a:spAutoFit/>
-          </a:bodyPr>
-          <a:lstStyle/>
-          <a:p>
-            <a:pPr algn="l">
-              <a:spcAft>
-                <a:spcPts val="585"/>
-              </a:spcAft>
-            </a:pPr>
-            <a:r>
-              <a:rPr sz="1500" b="1" i="0">
+              <a:t>Fear of mistakes</a:t>
+            </a:r>
+          </a:p>
+          <a:p>
+            <a:pPr algn="l">
+              <a:spcAft>
+                <a:spcPts val="855"/>
+              </a:spcAft>
+            </a:pPr>
+            <a:r>
+              <a:rPr sz="1900" b="0" i="0">
                 <a:solidFill>
                   <a:srgbClr val="1C1B19"/>
                 </a:solidFill>
                 <a:latin typeface="Source Serif 4"/>
               </a:rPr>
-              <a:t>Nobody shares grades or scores.</a:t>
-            </a:r>
-          </a:p>
-          <a:p>
-            <a:pPr algn="l">
-              <a:spcAft>
-                <a:spcPts val="585"/>
-              </a:spcAft>
-            </a:pPr>
-            <a:r>
-              <a:rPr sz="1300" b="0" i="0">
+              <a:t>Doubting it's ever good enough</a:t>
+            </a:r>
+          </a:p>
+          <a:p>
+            <a:pPr algn="l">
+              <a:spcAft>
+                <a:spcPts val="855"/>
+              </a:spcAft>
+            </a:pPr>
+            <a:r>
+              <a:rPr sz="1900" b="0" i="0">
                 <a:solidFill>
                   <a:srgbClr val="1C1B19"/>
                 </a:solidFill>
                 <a:latin typeface="Source Serif 4"/>
               </a:rPr>
-              <a:t>Keep to the examples on the slides. Don't ask what anyone got, where they're applying, or how they compare. In a small advisory, students already know a lot about each other's classes and results.</a:t>
-            </a:r>
-          </a:p>
-          <a:p>
-            <a:pPr algn="l">
-              <a:spcAft>
-                <a:spcPts val="585"/>
-              </a:spcAft>
-            </a:pPr>
-            <a:r>
-              <a:rPr sz="1300" b="0" i="0">
+              <a:t>"They only accept me if I'm flawless."</a:t>
+            </a:r>
+          </a:p>
+          <a:p>
+            <a:pPr algn="l">
+              <a:spcAft>
+                <a:spcPts val="855"/>
+              </a:spcAft>
+            </a:pPr>
+            <a:r>
+              <a:rPr sz="1900" b="0" i="0">
                 <a:solidFill>
                   <a:srgbClr val="1C1B19"/>
                 </a:solidFill>
                 <a:latin typeface="Source Serif 4"/>
               </a:rPr>
-              <a:t/>
-            </a:r>
-          </a:p>
-          <a:p>
-            <a:pPr algn="l">
-              <a:spcAft>
-                <a:spcPts val="585"/>
-              </a:spcAft>
-            </a:pPr>
-            <a:r>
-              <a:rPr sz="1500" b="1" i="0">
-                <a:solidFill>
-                  <a:srgbClr val="1C1B19"/>
-                </a:solidFill>
-                <a:latin typeface="Source Serif 4"/>
-              </a:rPr>
-              <a:t>Keep the stand-up items light.</a:t>
-            </a:r>
-          </a:p>
-          <a:p>
-            <a:pPr algn="l">
-              <a:spcAft>
-                <a:spcPts val="585"/>
-              </a:spcAft>
-            </a:pPr>
-            <a:r>
-              <a:rPr sz="1300" b="0" i="0">
-                <a:solidFill>
-                  <a:srgbClr val="1C1B19"/>
-                </a:solidFill>
-                <a:latin typeface="Source Serif 4"/>
-              </a:rPr>
-              <a:t>Use the five in the notes. Staying seated is always fine, and don't comment on who stood. Leave out food, bodies and sleep loss as items, because standing for those can single someone out.</a:t>
-            </a:r>
-          </a:p>
-          <a:p>
-            <a:pPr algn="l">
-              <a:spcAft>
-                <a:spcPts val="585"/>
-              </a:spcAft>
-            </a:pPr>
-            <a:r>
-              <a:rPr sz="1300" b="0" i="0">
-                <a:solidFill>
-                  <a:srgbClr val="1C1B19"/>
-                </a:solidFill>
-                <a:latin typeface="Source Serif 4"/>
-              </a:rPr>
-              <a:t/>
-            </a:r>
-          </a:p>
-          <a:p>
-            <a:pPr algn="l">
-              <a:spcAft>
-                <a:spcPts val="585"/>
-              </a:spcAft>
-            </a:pPr>
-            <a:r>
-              <a:rPr sz="1500" b="1" i="0">
-                <a:solidFill>
-                  <a:srgbClr val="1C1B19"/>
-                </a:solidFill>
-                <a:latin typeface="Source Serif 4"/>
-              </a:rPr>
-              <a:t>Watch for the heavier signs, without screening.</a:t>
-            </a:r>
-          </a:p>
-          <a:p>
-            <a:pPr algn="l">
-              <a:spcAft>
-                <a:spcPts val="585"/>
-              </a:spcAft>
-            </a:pPr>
-            <a:r>
-              <a:rPr sz="1300" b="0" i="0">
-                <a:solidFill>
-                  <a:srgbClr val="1C1B19"/>
-                </a:solidFill>
-                <a:latin typeface="Source Serif 4"/>
-              </a:rPr>
-              <a:t>The student page names restricting food, over-exercising, or hurting yourself when things aren't perfect as reasons to get help. Don't ask about these in the circle. If a student says something that worries you, thank them, follow up privately, and connect them with a counselor the same day.</a:t>
-            </a:r>
-          </a:p>
-          <a:p>
-            <a:pPr algn="l">
-              <a:spcAft>
-                <a:spcPts val="585"/>
-              </a:spcAft>
-            </a:pPr>
-            <a:r>
-              <a:rPr sz="1300" b="0" i="0">
-                <a:solidFill>
-                  <a:srgbClr val="1C1B19"/>
-                </a:solidFill>
-                <a:latin typeface="Source Serif 4"/>
-              </a:rPr>
-              <a:t/>
-            </a:r>
-          </a:p>
-        </p:txBody>
-      </p:sp>
-      <p:sp>
-        <p:nvSpPr>
-          <p:cNvPr id="6" name="TextBox 5"/>
-          <p:cNvSpPr txBox="1"/>
-          <p:nvPr/>
-        </p:nvSpPr>
-        <p:spPr>
-          <a:xfrm>
-            <a:off x="6217920" y="1463040"/>
-            <a:ext cx="5394960" cy="4937760"/>
-          </a:xfrm>
-          <a:prstGeom prst="rect">
-            <a:avLst/>
-          </a:prstGeom>
-          <a:noFill/>
-        </p:spPr>
-        <p:txBody>
-          <a:bodyPr wrap="square" anchor="t" lIns="0" rIns="0" tIns="0" bIns="0">
-            <a:spAutoFit/>
-          </a:bodyPr>
-          <a:lstStyle/>
-          <a:p>
-            <a:pPr algn="l">
-              <a:spcAft>
-                <a:spcPts val="585"/>
-              </a:spcAft>
-            </a:pPr>
-            <a:r>
-              <a:rPr sz="1500" b="1" i="0">
-                <a:solidFill>
-                  <a:srgbClr val="1C1B19"/>
-                </a:solidFill>
-                <a:latin typeface="Source Serif 4"/>
-              </a:rPr>
-              <a:t>Don't make it about blaming families.</a:t>
-            </a:r>
-          </a:p>
-          <a:p>
-            <a:pPr algn="l">
-              <a:spcAft>
-                <a:spcPts val="585"/>
-              </a:spcAft>
-            </a:pPr>
-            <a:r>
-              <a:rPr sz="1300" b="0" i="0">
-                <a:solidFill>
-                  <a:srgbClr val="1C1B19"/>
-                </a:solidFill>
-                <a:latin typeface="Source Serif 4"/>
-              </a:rPr>
-              <a:t>The 2022 research on parents' expectations is a correlation. Many students feel love and pressure from the same people. Let both be true, and keep the "where does it come from" question private.</a:t>
-            </a:r>
-          </a:p>
-          <a:p>
-            <a:pPr algn="l">
-              <a:spcAft>
-                <a:spcPts val="585"/>
-              </a:spcAft>
-            </a:pPr>
-            <a:r>
-              <a:rPr sz="1300" b="0" i="0">
-                <a:solidFill>
-                  <a:srgbClr val="1C1B19"/>
-                </a:solidFill>
-                <a:latin typeface="Source Serif 4"/>
-              </a:rPr>
-              <a:t/>
-            </a:r>
-          </a:p>
-          <a:p>
-            <a:pPr algn="l">
-              <a:spcAft>
-                <a:spcPts val="585"/>
-              </a:spcAft>
-            </a:pPr>
-            <a:r>
-              <a:rPr sz="1500" b="1" i="0">
-                <a:solidFill>
-                  <a:srgbClr val="1C1B19"/>
-                </a:solidFill>
-                <a:latin typeface="Source Serif 4"/>
-              </a:rPr>
-              <a:t>Not everyone in the circle is chasing a 94.</a:t>
-            </a:r>
-          </a:p>
-          <a:p>
-            <a:pPr algn="l">
-              <a:spcAft>
-                <a:spcPts val="585"/>
-              </a:spcAft>
-            </a:pPr>
-            <a:r>
-              <a:rPr sz="1300" b="0" i="0">
-                <a:solidFill>
-                  <a:srgbClr val="1C1B19"/>
-                </a:solidFill>
-                <a:latin typeface="Source Serif 4"/>
-              </a:rPr>
-              <a:t>Some students are working hard to pass, and talk about "easing up" can sound like it's meant for other people. The done line and grading the process help with any grade. Keep examples about effort and time rather than high scores.</a:t>
-            </a:r>
-          </a:p>
-          <a:p>
-            <a:pPr algn="l">
-              <a:spcAft>
-                <a:spcPts val="585"/>
-              </a:spcAft>
-            </a:pPr>
-            <a:r>
-              <a:rPr sz="1300" b="0" i="0">
-                <a:solidFill>
-                  <a:srgbClr val="1C1B19"/>
-                </a:solidFill>
-                <a:latin typeface="Source Serif 4"/>
-              </a:rPr>
-              <a:t/>
-            </a:r>
-          </a:p>
-          <a:p>
-            <a:pPr algn="l">
-              <a:spcAft>
-                <a:spcPts val="585"/>
-              </a:spcAft>
-            </a:pPr>
-            <a:r>
-              <a:rPr sz="1500" b="1" i="0">
-                <a:solidFill>
-                  <a:srgbClr val="1C1B19"/>
-                </a:solidFill>
-                <a:latin typeface="Source Serif 4"/>
-              </a:rPr>
-              <a:t>Model it if you can.</a:t>
-            </a:r>
-          </a:p>
-          <a:p>
-            <a:pPr algn="l">
-              <a:spcAft>
-                <a:spcPts val="585"/>
-              </a:spcAft>
-            </a:pPr>
-            <a:r>
-              <a:rPr sz="1300" b="0" i="0">
-                <a:solidFill>
-                  <a:srgbClr val="1C1B19"/>
-                </a:solidFill>
-                <a:latin typeface="Source Serif 4"/>
-              </a:rPr>
-              <a:t>A quick, true example of your own done line, or a mistake that turned out fine, helps more than a lecture. Keep it short and low stakes.</a:t>
-            </a:r>
-          </a:p>
-          <a:p>
-            <a:pPr algn="l">
-              <a:spcAft>
-                <a:spcPts val="585"/>
-              </a:spcAft>
-            </a:pPr>
-            <a:r>
-              <a:rPr sz="1300" b="0" i="0">
-                <a:solidFill>
-                  <a:srgbClr val="1C1B19"/>
-                </a:solidFill>
-                <a:latin typeface="Source Serif 4"/>
-              </a:rPr>
-              <a:t/>
+              <a:t>Tied to anxiety, burnout, avoidance</a:t>
             </a:r>
           </a:p>
         </p:txBody>
@@ -5634,13 +6814,13 @@
 </p:sld>
 </file>
 
-<file path=ppt/slides/slide3.xml><?xml version="1.0" encoding="utf-8"?>
-<p:sld xmlns:a="http://schemas.openxmlformats.org/drawingml/2006/main" xmlns:p="http://schemas.openxmlformats.org/presentationml/2006/main" xmlns:r="http://schemas.openxmlformats.org/officeDocument/2006/relationships" show="0">
+<file path=ppt/slides/slide5.xml><?xml version="1.0" encoding="utf-8"?>
+<p:sld xmlns:a="http://schemas.openxmlformats.org/drawingml/2006/main" xmlns:p="http://schemas.openxmlformats.org/presentationml/2006/main" xmlns:r="http://schemas.openxmlformats.org/officeDocument/2006/relationships">
   <p:cSld>
     <p:bg>
       <p:bgPr>
         <a:solidFill>
-          <a:srgbClr val="EEEBE4"/>
+          <a:srgbClr val="F7F4EE"/>
         </a:solidFill>
         <a:effectLst/>
       </p:bgPr>
@@ -5660,14 +6840,14 @@
         </p:nvSpPr>
         <p:spPr>
           <a:xfrm>
-            <a:off x="0" y="0"/>
-            <a:ext cx="12191695" cy="384048"/>
+            <a:off x="548640" y="502920"/>
+            <a:ext cx="457200" cy="54864"/>
           </a:xfrm>
           <a:prstGeom prst="rect">
             <a:avLst/>
           </a:prstGeom>
           <a:solidFill>
-            <a:srgbClr val="0B2D5B"/>
+            <a:srgbClr val="F47B20"/>
           </a:solidFill>
           <a:ln>
             <a:noFill/>
@@ -5704,8 +6884,8 @@
         </p:nvSpPr>
         <p:spPr>
           <a:xfrm>
-            <a:off x="548640" y="100584"/>
-            <a:ext cx="10972800" cy="274320"/>
+            <a:off x="1143000" y="393192"/>
+            <a:ext cx="8229600" cy="274320"/>
           </a:xfrm>
           <a:prstGeom prst="rect">
             <a:avLst/>
@@ -5720,17 +6900,17 @@
           <a:p>
             <a:pPr algn="l">
               <a:spcAft>
-                <a:spcPts val="495"/>
-              </a:spcAft>
-            </a:pPr>
-            <a:r>
-              <a:rPr sz="1100" b="1" i="0">
-                <a:solidFill>
-                  <a:srgbClr val="FFFFFF"/>
+                <a:spcPts val="540"/>
+              </a:spcAft>
+            </a:pPr>
+            <a:r>
+              <a:rPr sz="1200" b="1" i="0">
+                <a:solidFill>
+                  <a:srgbClr val="5D5A54"/>
                 </a:solidFill>
                 <a:latin typeface="Inter Tight"/>
               </a:rPr>
-              <a:t>TEACHER PAGE  ·  skipped when you present  ·  Every student in the room</a:t>
+              <a:t>IT ISN'T ONLY ABOUT YOU</a:t>
             </a:r>
           </a:p>
         </p:txBody>
@@ -5743,8 +6923,8 @@
         </p:nvSpPr>
         <p:spPr>
           <a:xfrm>
-            <a:off x="548640" y="685800"/>
-            <a:ext cx="10972800" cy="640080"/>
+            <a:off x="8229600" y="6400800"/>
+            <a:ext cx="3410712" cy="274320"/>
           </a:xfrm>
           <a:prstGeom prst="rect">
             <a:avLst/>
@@ -5757,19 +6937,19 @@
           </a:bodyPr>
           <a:lstStyle/>
           <a:p>
-            <a:pPr algn="l">
-              <a:spcAft>
-                <a:spcPts val="1350"/>
-              </a:spcAft>
-            </a:pPr>
-            <a:r>
-              <a:rPr sz="3000" b="1" i="0">
-                <a:solidFill>
-                  <a:srgbClr val="1C1B19"/>
-                </a:solidFill>
-                <a:latin typeface="Source Serif 4"/>
-              </a:rPr>
-              <a:t>Every student in the room</a:t>
+            <a:pPr algn="r">
+              <a:spcAft>
+                <a:spcPts val="450"/>
+              </a:spcAft>
+            </a:pPr>
+            <a:r>
+              <a:rPr sz="1000" b="0" i="0">
+                <a:solidFill>
+                  <a:srgbClr val="5D5A54"/>
+                </a:solidFill>
+                <a:latin typeface="Inter Tight"/>
+              </a:rPr>
+              <a:t>Beaver Counseling</a:t>
             </a:r>
           </a:p>
         </p:txBody>
@@ -5782,8 +6962,8 @@
         </p:nvSpPr>
         <p:spPr>
           <a:xfrm>
-            <a:off x="548640" y="1325880"/>
-            <a:ext cx="10972800" cy="365760"/>
+            <a:off x="822960" y="1463040"/>
+            <a:ext cx="10515600" cy="3291840"/>
           </a:xfrm>
           <a:prstGeom prst="rect">
             <a:avLst/>
@@ -5791,24 +6971,24 @@
           <a:noFill/>
         </p:spPr>
         <p:txBody>
-          <a:bodyPr wrap="square" anchor="t" lIns="0" rIns="0" tIns="0" bIns="0">
+          <a:bodyPr wrap="square" anchor="ctr" lIns="0" rIns="0" tIns="0" bIns="0">
             <a:spAutoFit/>
           </a:bodyPr>
           <a:lstStyle/>
           <a:p>
             <a:pPr algn="l">
               <a:spcAft>
-                <a:spcPts val="630"/>
-              </a:spcAft>
-            </a:pPr>
-            <a:r>
-              <a:rPr sz="1400" b="0" i="0">
-                <a:solidFill>
-                  <a:srgbClr val="5D5A54"/>
-                </a:solidFill>
-                <a:latin typeface="Inter Tight"/>
-              </a:rPr>
-              <a:t>Culture, family, identity, ability and money: what to keep in mind for this topic.</a:t>
+                <a:spcPts val="2070"/>
+              </a:spcAft>
+            </a:pPr>
+            <a:r>
+              <a:rPr sz="4600" b="1" i="0">
+                <a:solidFill>
+                  <a:srgbClr val="1C1B19"/>
+                </a:solidFill>
+                <a:latin typeface="Source Serif 4"/>
+              </a:rPr>
+              <a:t>The sense that others demand perfection rose about 33%.</a:t>
             </a:r>
           </a:p>
         </p:txBody>
@@ -5821,8 +7001,8 @@
         </p:nvSpPr>
         <p:spPr>
           <a:xfrm>
-            <a:off x="548640" y="1828800"/>
-            <a:ext cx="5394960" cy="4572000"/>
+            <a:off x="822960" y="4846320"/>
+            <a:ext cx="10515600" cy="1097280"/>
           </a:xfrm>
           <a:prstGeom prst="rect">
             <a:avLst/>
@@ -5837,963 +7017,17 @@
           <a:p>
             <a:pPr algn="l">
               <a:spcAft>
-                <a:spcPts val="585"/>
-              </a:spcAft>
-            </a:pPr>
-            <a:r>
-              <a:rPr sz="1500" b="1" i="0">
-                <a:solidFill>
-                  <a:srgbClr val="1C1B19"/>
+                <a:spcPts val="990"/>
+              </a:spcAft>
+            </a:pPr>
+            <a:r>
+              <a:rPr sz="2200" b="0" i="1">
+                <a:solidFill>
+                  <a:srgbClr val="5D5A54"/>
                 </a:solidFill>
                 <a:latin typeface="Source Serif 4"/>
               </a:rPr>
-              <a:t>First to go to college, or carrying a family's sacrifice.</a:t>
-            </a:r>
-          </a:p>
-          <a:p>
-            <a:pPr algn="l">
-              <a:spcAft>
-                <a:spcPts val="585"/>
-              </a:spcAft>
-            </a:pPr>
-            <a:r>
-              <a:rPr sz="1300" b="0" i="0">
-                <a:solidFill>
-                  <a:srgbClr val="1C1B19"/>
-                </a:solidFill>
-                <a:latin typeface="Source Serif 4"/>
-              </a:rPr>
-              <a:t>For some students a grade holds a family's move to this country, years of hard work, or being the first to go to college. Honor that. Present "talk about how much you're carrying" as an option, never as pushing back on family.</a:t>
-            </a:r>
-          </a:p>
-          <a:p>
-            <a:pPr algn="l">
-              <a:spcAft>
-                <a:spcPts val="585"/>
-              </a:spcAft>
-            </a:pPr>
-            <a:r>
-              <a:rPr sz="1300" b="0" i="0">
-                <a:solidFill>
-                  <a:srgbClr val="1C1B19"/>
-                </a:solidFill>
-                <a:latin typeface="Source Serif 4"/>
-              </a:rPr>
-              <a:t/>
-            </a:r>
-          </a:p>
-          <a:p>
-            <a:pPr algn="l">
-              <a:spcAft>
-                <a:spcPts val="585"/>
-              </a:spcAft>
-            </a:pPr>
-            <a:r>
-              <a:rPr sz="1500" b="1" i="0">
-                <a:solidFill>
-                  <a:srgbClr val="1C1B19"/>
-                </a:solidFill>
-                <a:latin typeface="Source Serif 4"/>
-              </a:rPr>
-              <a:t>One of the only people like you in the class.</a:t>
-            </a:r>
-          </a:p>
-          <a:p>
-            <a:pPr algn="l">
-              <a:spcAft>
-                <a:spcPts val="585"/>
-              </a:spcAft>
-            </a:pPr>
-            <a:r>
-              <a:rPr sz="1300" b="0" i="0">
-                <a:solidFill>
-                  <a:srgbClr val="1C1B19"/>
-                </a:solidFill>
-                <a:latin typeface="Source Serif 4"/>
-              </a:rPr>
-              <a:t>Students of color, and others who feel watched in advanced classes, may feel a mistake reflects on more than themselves. Name that pressure as real and partly outside their control, and keep the done line about what is in their control.</a:t>
-            </a:r>
-          </a:p>
-          <a:p>
-            <a:pPr algn="l">
-              <a:spcAft>
-                <a:spcPts val="585"/>
-              </a:spcAft>
-            </a:pPr>
-            <a:r>
-              <a:rPr sz="1300" b="0" i="0">
-                <a:solidFill>
-                  <a:srgbClr val="1C1B19"/>
-                </a:solidFill>
-                <a:latin typeface="Source Serif 4"/>
-              </a:rPr>
-              <a:t/>
-            </a:r>
-          </a:p>
-          <a:p>
-            <a:pPr algn="l">
-              <a:spcAft>
-                <a:spcPts val="585"/>
-              </a:spcAft>
-            </a:pPr>
-            <a:r>
-              <a:rPr sz="1500" b="1" i="0">
-                <a:solidFill>
-                  <a:srgbClr val="1C1B19"/>
-                </a:solidFill>
-                <a:latin typeface="Source Serif 4"/>
-              </a:rPr>
-              <a:t>Expectations come from different adults.</a:t>
-            </a:r>
-          </a:p>
-          <a:p>
-            <a:pPr algn="l">
-              <a:spcAft>
-                <a:spcPts val="585"/>
-              </a:spcAft>
-            </a:pPr>
-            <a:r>
-              <a:rPr sz="1300" b="0" i="0">
-                <a:solidFill>
-                  <a:srgbClr val="1C1B19"/>
-                </a:solidFill>
-                <a:latin typeface="Source Serif 4"/>
-              </a:rPr>
-              <a:t>The "have to" voice might belong to a single parent, a grandparent, an older sibling, a coach, or the student. Say "the adults in your life" or "family" rather than "your parents."</a:t>
-            </a:r>
-          </a:p>
-          <a:p>
-            <a:pPr algn="l">
-              <a:spcAft>
-                <a:spcPts val="585"/>
-              </a:spcAft>
-            </a:pPr>
-            <a:r>
-              <a:rPr sz="1300" b="0" i="0">
-                <a:solidFill>
-                  <a:srgbClr val="1C1B19"/>
-                </a:solidFill>
-                <a:latin typeface="Source Serif 4"/>
-              </a:rPr>
-              <a:t/>
-            </a:r>
-          </a:p>
-        </p:txBody>
-      </p:sp>
-      <p:sp>
-        <p:nvSpPr>
-          <p:cNvPr id="7" name="TextBox 6"/>
-          <p:cNvSpPr txBox="1"/>
-          <p:nvPr/>
-        </p:nvSpPr>
-        <p:spPr>
-          <a:xfrm>
-            <a:off x="6217920" y="1828800"/>
-            <a:ext cx="5394960" cy="4572000"/>
-          </a:xfrm>
-          <a:prstGeom prst="rect">
-            <a:avLst/>
-          </a:prstGeom>
-          <a:noFill/>
-        </p:spPr>
-        <p:txBody>
-          <a:bodyPr wrap="square" anchor="t" lIns="0" rIns="0" tIns="0" bIns="0">
-            <a:spAutoFit/>
-          </a:bodyPr>
-          <a:lstStyle/>
-          <a:p>
-            <a:pPr algn="l">
-              <a:spcAft>
-                <a:spcPts val="585"/>
-              </a:spcAft>
-            </a:pPr>
-            <a:r>
-              <a:rPr sz="1500" b="1" i="0">
-                <a:solidFill>
-                  <a:srgbClr val="1C1B19"/>
-                </a:solidFill>
-                <a:latin typeface="Source Serif 4"/>
-              </a:rPr>
-              <a:t>Learning differences and attention.</a:t>
-            </a:r>
-          </a:p>
-          <a:p>
-            <a:pPr algn="l">
-              <a:spcAft>
-                <a:spcPts val="585"/>
-              </a:spcAft>
-            </a:pPr>
-            <a:r>
-              <a:rPr sz="1300" b="0" i="0">
-                <a:solidFill>
-                  <a:srgbClr val="1C1B19"/>
-                </a:solidFill>
-                <a:latin typeface="Source Serif 4"/>
-              </a:rPr>
-              <a:t>Students with a learning plan, ADHD, or slower processing may already spend longer on everything, so a time limit can feel unfair. Let them define what finished looks like first and set the time second. Avoid calling anyone "so OCD" about their work.</a:t>
-            </a:r>
-          </a:p>
-          <a:p>
-            <a:pPr algn="l">
-              <a:spcAft>
-                <a:spcPts val="585"/>
-              </a:spcAft>
-            </a:pPr>
-            <a:r>
-              <a:rPr sz="1300" b="0" i="0">
-                <a:solidFill>
-                  <a:srgbClr val="1C1B19"/>
-                </a:solidFill>
-                <a:latin typeface="Source Serif 4"/>
-              </a:rPr>
-              <a:t/>
-            </a:r>
-          </a:p>
-          <a:p>
-            <a:pPr algn="l">
-              <a:spcAft>
-                <a:spcPts val="585"/>
-              </a:spcAft>
-            </a:pPr>
-            <a:r>
-              <a:rPr sz="1500" b="1" i="0">
-                <a:solidFill>
-                  <a:srgbClr val="1C1B19"/>
-                </a:solidFill>
-                <a:latin typeface="Source Serif 4"/>
-              </a:rPr>
-              <a:t>Time and money aren't equal.</a:t>
-            </a:r>
-          </a:p>
-          <a:p>
-            <a:pPr algn="l">
-              <a:spcAft>
-                <a:spcPts val="585"/>
-              </a:spcAft>
-            </a:pPr>
-            <a:r>
-              <a:rPr sz="1300" b="0" i="0">
-                <a:solidFill>
-                  <a:srgbClr val="1C1B19"/>
-                </a:solidFill>
-                <a:latin typeface="Source Serif 4"/>
-              </a:rPr>
-              <a:t>Some students work a job, care for siblings, or can't pay for a tutor. Office hours and asking a teacher are free. Don't treat a summer internship or paid program as the standard; Amara's card is one example among many.</a:t>
-            </a:r>
-          </a:p>
-          <a:p>
-            <a:pPr algn="l">
-              <a:spcAft>
-                <a:spcPts val="585"/>
-              </a:spcAft>
-            </a:pPr>
-            <a:r>
-              <a:rPr sz="1300" b="0" i="0">
-                <a:solidFill>
-                  <a:srgbClr val="1C1B19"/>
-                </a:solidFill>
-                <a:latin typeface="Source Serif 4"/>
-              </a:rPr>
-              <a:t/>
-            </a:r>
-          </a:p>
-          <a:p>
-            <a:pPr algn="l">
-              <a:spcAft>
-                <a:spcPts val="585"/>
-              </a:spcAft>
-            </a:pPr>
-            <a:r>
-              <a:rPr sz="1500" b="1" i="0">
-                <a:solidFill>
-                  <a:srgbClr val="1C1B19"/>
-                </a:solidFill>
-                <a:latin typeface="Source Serif 4"/>
-              </a:rPr>
-              <a:t>Gender expectations.</a:t>
-            </a:r>
-          </a:p>
-          <a:p>
-            <a:pPr algn="l">
-              <a:spcAft>
-                <a:spcPts val="585"/>
-              </a:spcAft>
-            </a:pPr>
-            <a:r>
-              <a:rPr sz="1300" b="0" i="0">
-                <a:solidFill>
-                  <a:srgbClr val="1C1B19"/>
-                </a:solidFill>
-                <a:latin typeface="Source Serif 4"/>
-              </a:rPr>
-              <a:t>Some students feel they have to look flawless, and others feel they have to look effortless and never show they tried. Both come from the fear side. Mix genders in your examples and don't treat either as a girls' or boys' problem.</a:t>
-            </a:r>
-          </a:p>
-          <a:p>
-            <a:pPr algn="l">
-              <a:spcAft>
-                <a:spcPts val="585"/>
-              </a:spcAft>
-            </a:pPr>
-            <a:r>
-              <a:rPr sz="1300" b="0" i="0">
-                <a:solidFill>
-                  <a:srgbClr val="1C1B19"/>
-                </a:solidFill>
-                <a:latin typeface="Source Serif 4"/>
-              </a:rPr>
-              <a:t/>
-            </a:r>
-          </a:p>
-        </p:txBody>
-      </p:sp>
-    </p:spTree>
-  </p:cSld>
-  <p:clrMapOvr>
-    <a:masterClrMapping/>
-  </p:clrMapOvr>
-</p:sld>
-</file>
-
-<file path=ppt/slides/slide4.xml><?xml version="1.0" encoding="utf-8"?>
-<p:sld xmlns:a="http://schemas.openxmlformats.org/drawingml/2006/main" xmlns:p="http://schemas.openxmlformats.org/presentationml/2006/main" xmlns:r="http://schemas.openxmlformats.org/officeDocument/2006/relationships" show="0">
-  <p:cSld>
-    <p:bg>
-      <p:bgPr>
-        <a:solidFill>
-          <a:srgbClr val="EEEBE4"/>
-        </a:solidFill>
-        <a:effectLst/>
-      </p:bgPr>
-    </p:bg>
-    <p:spTree>
-      <p:nvGrpSpPr>
-        <p:cNvPr id="1" name=""/>
-        <p:cNvGrpSpPr/>
-        <p:nvPr/>
-      </p:nvGrpSpPr>
-      <p:grpSpPr/>
-      <p:sp>
-        <p:nvSpPr>
-          <p:cNvPr id="2" name="Rectangle 1"/>
-          <p:cNvSpPr/>
-          <p:nvPr/>
-        </p:nvSpPr>
-        <p:spPr>
-          <a:xfrm>
-            <a:off x="0" y="0"/>
-            <a:ext cx="12191695" cy="384048"/>
-          </a:xfrm>
-          <a:prstGeom prst="rect">
-            <a:avLst/>
-          </a:prstGeom>
-          <a:solidFill>
-            <a:srgbClr val="0B2D5B"/>
-          </a:solidFill>
-          <a:ln>
-            <a:noFill/>
-          </a:ln>
-          <a:effectLst/>
-        </p:spPr>
-        <p:style>
-          <a:lnRef idx="1">
-            <a:schemeClr val="accent1"/>
-          </a:lnRef>
-          <a:fillRef idx="3">
-            <a:schemeClr val="accent1"/>
-          </a:fillRef>
-          <a:effectRef idx="2">
-            <a:schemeClr val="accent1"/>
-          </a:effectRef>
-          <a:fontRef idx="minor">
-            <a:schemeClr val="lt1"/>
-          </a:fontRef>
-        </p:style>
-        <p:txBody>
-          <a:bodyPr rtlCol="0" anchor="ctr"/>
-          <a:lstStyle/>
-          <a:p>
-            <a:pPr algn="ctr"/>
-          </a:p>
-        </p:txBody>
-      </p:sp>
-      <p:sp>
-        <p:nvSpPr>
-          <p:cNvPr id="3" name="TextBox 2"/>
-          <p:cNvSpPr txBox="1"/>
-          <p:nvPr/>
-        </p:nvSpPr>
-        <p:spPr>
-          <a:xfrm>
-            <a:off x="548640" y="100584"/>
-            <a:ext cx="10972800" cy="274320"/>
-          </a:xfrm>
-          <a:prstGeom prst="rect">
-            <a:avLst/>
-          </a:prstGeom>
-          <a:noFill/>
-        </p:spPr>
-        <p:txBody>
-          <a:bodyPr wrap="square" anchor="t" lIns="0" rIns="0" tIns="0" bIns="0">
-            <a:spAutoFit/>
-          </a:bodyPr>
-          <a:lstStyle/>
-          <a:p>
-            <a:pPr algn="l">
-              <a:spcAft>
-                <a:spcPts val="495"/>
-              </a:spcAft>
-            </a:pPr>
-            <a:r>
-              <a:rPr sz="1100" b="1" i="0">
-                <a:solidFill>
-                  <a:srgbClr val="FFFFFF"/>
-                </a:solidFill>
-                <a:latin typeface="Inter Tight"/>
-              </a:rPr>
-              <a:t>TEACHER PAGE  ·  skipped when you present  ·  Background</a:t>
-            </a:r>
-          </a:p>
-        </p:txBody>
-      </p:sp>
-      <p:sp>
-        <p:nvSpPr>
-          <p:cNvPr id="4" name="TextBox 3"/>
-          <p:cNvSpPr txBox="1"/>
-          <p:nvPr/>
-        </p:nvSpPr>
-        <p:spPr>
-          <a:xfrm>
-            <a:off x="548640" y="685800"/>
-            <a:ext cx="10972800" cy="640080"/>
-          </a:xfrm>
-          <a:prstGeom prst="rect">
-            <a:avLst/>
-          </a:prstGeom>
-          <a:noFill/>
-        </p:spPr>
-        <p:txBody>
-          <a:bodyPr wrap="square" anchor="t" lIns="0" rIns="0" tIns="0" bIns="0">
-            <a:spAutoFit/>
-          </a:bodyPr>
-          <a:lstStyle/>
-          <a:p>
-            <a:pPr algn="l">
-              <a:spcAft>
-                <a:spcPts val="1350"/>
-              </a:spcAft>
-            </a:pPr>
-            <a:r>
-              <a:rPr sz="3000" b="1" i="0">
-                <a:solidFill>
-                  <a:srgbClr val="1C1B19"/>
-                </a:solidFill>
-                <a:latin typeface="Source Serif 4"/>
-              </a:rPr>
-              <a:t>What the research says</a:t>
-            </a:r>
-          </a:p>
-        </p:txBody>
-      </p:sp>
-      <p:sp>
-        <p:nvSpPr>
-          <p:cNvPr id="5" name="TextBox 4"/>
-          <p:cNvSpPr txBox="1"/>
-          <p:nvPr/>
-        </p:nvSpPr>
-        <p:spPr>
-          <a:xfrm>
-            <a:off x="548640" y="1463040"/>
-            <a:ext cx="5394960" cy="4937760"/>
-          </a:xfrm>
-          <a:prstGeom prst="rect">
-            <a:avLst/>
-          </a:prstGeom>
-          <a:noFill/>
-        </p:spPr>
-        <p:txBody>
-          <a:bodyPr wrap="square" anchor="t" lIns="0" rIns="0" tIns="0" bIns="0">
-            <a:spAutoFit/>
-          </a:bodyPr>
-          <a:lstStyle/>
-          <a:p>
-            <a:pPr algn="l">
-              <a:spcAft>
-                <a:spcPts val="585"/>
-              </a:spcAft>
-            </a:pPr>
-            <a:r>
-              <a:rPr sz="1300" b="0" i="0">
-                <a:solidFill>
-                  <a:srgbClr val="1C1B19"/>
-                </a:solidFill>
-                <a:latin typeface="Source Serif 4"/>
-              </a:rPr>
-              <a:t>Researchers split perfectionism into strivings (high standards and hard work) and concerns (fear of mistakes, doubt, and the sense that people only accept you if you're flawless). Later studies support parts of this model, not all of it.</a:t>
-            </a:r>
-          </a:p>
-          <a:p>
-            <a:pPr algn="l">
-              <a:spcAft>
-                <a:spcPts val="585"/>
-              </a:spcAft>
-            </a:pPr>
-            <a:r>
-              <a:rPr sz="1050" b="0" i="0">
-                <a:solidFill>
-                  <a:srgbClr val="5D5A54"/>
-                </a:solidFill>
-                <a:latin typeface="Inter Tight"/>
-              </a:rPr>
-              <a:t>Gaudreau and Thompson, Personality and Individual Differences, 2010</a:t>
-            </a:r>
-          </a:p>
-          <a:p>
-            <a:pPr algn="l">
-              <a:spcAft>
-                <a:spcPts val="585"/>
-              </a:spcAft>
-            </a:pPr>
-            <a:r>
-              <a:rPr sz="1300" b="0" i="0">
-                <a:solidFill>
-                  <a:srgbClr val="1C1B19"/>
-                </a:solidFill>
-                <a:latin typeface="Source Serif 4"/>
-              </a:rPr>
-              <a:t>On their own, high personal standards tend to go with motivation and good outcomes.</a:t>
-            </a:r>
-          </a:p>
-          <a:p>
-            <a:pPr algn="l">
-              <a:spcAft>
-                <a:spcPts val="585"/>
-              </a:spcAft>
-            </a:pPr>
-            <a:r>
-              <a:rPr sz="1050" b="0" i="0">
-                <a:solidFill>
-                  <a:srgbClr val="5D5A54"/>
-                </a:solidFill>
-                <a:latin typeface="Inter Tight"/>
-              </a:rPr>
-              <a:t>Stoeber and Otto, Personality and Social Psychology Review, 2006</a:t>
-            </a:r>
-          </a:p>
-          <a:p>
-            <a:pPr algn="l">
-              <a:spcAft>
-                <a:spcPts val="585"/>
-              </a:spcAft>
-            </a:pPr>
-            <a:r>
-              <a:rPr sz="1300" b="0" i="0">
-                <a:solidFill>
-                  <a:srgbClr val="1C1B19"/>
-                </a:solidFill>
-                <a:latin typeface="Source Serif 4"/>
-              </a:rPr>
-              <a:t>Socially prescribed perfectionism, the belief that other people demand perfection from you, is one of three types, along with perfectionism aimed at yourself and at others.</a:t>
-            </a:r>
-          </a:p>
-          <a:p>
-            <a:pPr algn="l">
-              <a:spcAft>
-                <a:spcPts val="585"/>
-              </a:spcAft>
-            </a:pPr>
-            <a:r>
-              <a:rPr sz="1050" b="0" i="0">
-                <a:solidFill>
-                  <a:srgbClr val="5D5A54"/>
-                </a:solidFill>
-                <a:latin typeface="Inter Tight"/>
-              </a:rPr>
-              <a:t>Hewitt and Flett, Journal of Personality and Social Psychology, 1991</a:t>
-            </a:r>
-          </a:p>
-        </p:txBody>
-      </p:sp>
-      <p:sp>
-        <p:nvSpPr>
-          <p:cNvPr id="6" name="TextBox 5"/>
-          <p:cNvSpPr txBox="1"/>
-          <p:nvPr/>
-        </p:nvSpPr>
-        <p:spPr>
-          <a:xfrm>
-            <a:off x="6217920" y="1463040"/>
-            <a:ext cx="5394960" cy="4937760"/>
-          </a:xfrm>
-          <a:prstGeom prst="rect">
-            <a:avLst/>
-          </a:prstGeom>
-          <a:noFill/>
-        </p:spPr>
-        <p:txBody>
-          <a:bodyPr wrap="square" anchor="t" lIns="0" rIns="0" tIns="0" bIns="0">
-            <a:spAutoFit/>
-          </a:bodyPr>
-          <a:lstStyle/>
-          <a:p>
-            <a:pPr algn="l">
-              <a:spcAft>
-                <a:spcPts val="585"/>
-              </a:spcAft>
-            </a:pPr>
-            <a:r>
-              <a:rPr sz="1300" b="0" i="0">
-                <a:solidFill>
-                  <a:srgbClr val="1C1B19"/>
-                </a:solidFill>
-                <a:latin typeface="Source Serif 4"/>
-              </a:rPr>
-              <a:t>Across 41,641 college students in the U.S., Canada and the U.K. from 1989 to 2016, all three types of perfectionism rose. The sense that others demand perfection rose most, by about 33%.</a:t>
-            </a:r>
-          </a:p>
-          <a:p>
-            <a:pPr algn="l">
-              <a:spcAft>
-                <a:spcPts val="585"/>
-              </a:spcAft>
-            </a:pPr>
-            <a:r>
-              <a:rPr sz="1050" b="0" i="0">
-                <a:solidFill>
-                  <a:srgbClr val="5D5A54"/>
-                </a:solidFill>
-                <a:latin typeface="Inter Tight"/>
-              </a:rPr>
-              <a:t>Curran and Hill, Psychological Bulletin, 2019</a:t>
-            </a:r>
-          </a:p>
-          <a:p>
-            <a:pPr algn="l">
-              <a:spcAft>
-                <a:spcPts val="585"/>
-              </a:spcAft>
-            </a:pPr>
-            <a:r>
-              <a:rPr sz="1300" b="0" i="0">
-                <a:solidFill>
-                  <a:srgbClr val="1C1B19"/>
-                </a:solidFill>
-                <a:latin typeface="Source Serif 4"/>
-              </a:rPr>
-              <a:t>Students' sense of their parents' expectations and criticism also rose over those decades and tracked with perfectionism. It's a correlation; the authors point to more competitive, higher-stakes environments.</a:t>
-            </a:r>
-          </a:p>
-          <a:p>
-            <a:pPr algn="l">
-              <a:spcAft>
-                <a:spcPts val="585"/>
-              </a:spcAft>
-            </a:pPr>
-            <a:r>
-              <a:rPr sz="1050" b="0" i="0">
-                <a:solidFill>
-                  <a:srgbClr val="5D5A54"/>
-                </a:solidFill>
-                <a:latin typeface="Inter Tight"/>
-              </a:rPr>
-              <a:t>Curran and Hill, Psychological Bulletin, 2022</a:t>
-            </a:r>
-          </a:p>
-          <a:p>
-            <a:pPr algn="l">
-              <a:spcAft>
-                <a:spcPts val="585"/>
-              </a:spcAft>
-            </a:pPr>
-            <a:r>
-              <a:rPr sz="1300" b="0" i="0">
-                <a:solidFill>
-                  <a:srgbClr val="1C1B19"/>
-                </a:solidFill>
-                <a:latin typeface="Source Serif 4"/>
-              </a:rPr>
-              <a:t>A review of 284 studies linked perfectionism to depression, anxiety, OCD, eating disorders and self-harm, which is why therapists treat it as a risk factor across many problems.</a:t>
-            </a:r>
-          </a:p>
-          <a:p>
-            <a:pPr algn="l">
-              <a:spcAft>
-                <a:spcPts val="585"/>
-              </a:spcAft>
-            </a:pPr>
-            <a:r>
-              <a:rPr sz="1050" b="0" i="0">
-                <a:solidFill>
-                  <a:srgbClr val="5D5A54"/>
-                </a:solidFill>
-                <a:latin typeface="Inter Tight"/>
-              </a:rPr>
-              <a:t>Limburg, Watson, Hagger and Egan, Journal of Clinical Psychology, 2017</a:t>
-            </a:r>
-          </a:p>
-        </p:txBody>
-      </p:sp>
-    </p:spTree>
-  </p:cSld>
-  <p:clrMapOvr>
-    <a:masterClrMapping/>
-  </p:clrMapOvr>
-</p:sld>
-</file>
-
-<file path=ppt/slides/slide5.xml><?xml version="1.0" encoding="utf-8"?>
-<p:sld xmlns:a="http://schemas.openxmlformats.org/drawingml/2006/main" xmlns:p="http://schemas.openxmlformats.org/presentationml/2006/main" xmlns:r="http://schemas.openxmlformats.org/officeDocument/2006/relationships">
-  <p:cSld>
-    <p:bg>
-      <p:bgPr>
-        <a:solidFill>
-          <a:srgbClr val="0B2D5B"/>
-        </a:solidFill>
-        <a:effectLst/>
-      </p:bgPr>
-    </p:bg>
-    <p:spTree>
-      <p:nvGrpSpPr>
-        <p:cNvPr id="1" name=""/>
-        <p:cNvGrpSpPr/>
-        <p:nvPr/>
-      </p:nvGrpSpPr>
-      <p:grpSpPr/>
-      <p:sp>
-        <p:nvSpPr>
-          <p:cNvPr id="2" name="Rectangle 1"/>
-          <p:cNvSpPr/>
-          <p:nvPr/>
-        </p:nvSpPr>
-        <p:spPr>
-          <a:xfrm>
-            <a:off x="548640" y="502920"/>
-            <a:ext cx="457200" cy="54864"/>
-          </a:xfrm>
-          <a:prstGeom prst="rect">
-            <a:avLst/>
-          </a:prstGeom>
-          <a:solidFill>
-            <a:srgbClr val="F47B20"/>
-          </a:solidFill>
-          <a:ln>
-            <a:noFill/>
-          </a:ln>
-          <a:effectLst/>
-        </p:spPr>
-        <p:style>
-          <a:lnRef idx="1">
-            <a:schemeClr val="accent1"/>
-          </a:lnRef>
-          <a:fillRef idx="3">
-            <a:schemeClr val="accent1"/>
-          </a:fillRef>
-          <a:effectRef idx="2">
-            <a:schemeClr val="accent1"/>
-          </a:effectRef>
-          <a:fontRef idx="minor">
-            <a:schemeClr val="lt1"/>
-          </a:fontRef>
-        </p:style>
-        <p:txBody>
-          <a:bodyPr rtlCol="0" anchor="ctr"/>
-          <a:lstStyle/>
-          <a:p>
-            <a:pPr algn="ctr"/>
-          </a:p>
-        </p:txBody>
-      </p:sp>
-      <p:sp>
-        <p:nvSpPr>
-          <p:cNvPr id="3" name="TextBox 2"/>
-          <p:cNvSpPr txBox="1"/>
-          <p:nvPr/>
-        </p:nvSpPr>
-        <p:spPr>
-          <a:xfrm>
-            <a:off x="1143000" y="393192"/>
-            <a:ext cx="8229600" cy="274320"/>
-          </a:xfrm>
-          <a:prstGeom prst="rect">
-            <a:avLst/>
-          </a:prstGeom>
-          <a:noFill/>
-        </p:spPr>
-        <p:txBody>
-          <a:bodyPr wrap="square" anchor="t" lIns="0" rIns="0" tIns="0" bIns="0">
-            <a:spAutoFit/>
-          </a:bodyPr>
-          <a:lstStyle/>
-          <a:p>
-            <a:pPr algn="l">
-              <a:spcAft>
-                <a:spcPts val="540"/>
-              </a:spcAft>
-            </a:pPr>
-            <a:r>
-              <a:rPr sz="1200" b="1" i="0">
-                <a:solidFill>
-                  <a:srgbClr val="5D5A54"/>
-                </a:solidFill>
-                <a:latin typeface="Inter Tight"/>
-              </a:rPr>
-              <a:t>PERFECT IS A TRAP</a:t>
-            </a:r>
-          </a:p>
-        </p:txBody>
-      </p:sp>
-      <p:sp>
-        <p:nvSpPr>
-          <p:cNvPr id="4" name="TextBox 3"/>
-          <p:cNvSpPr txBox="1"/>
-          <p:nvPr/>
-        </p:nvSpPr>
-        <p:spPr>
-          <a:xfrm>
-            <a:off x="8229600" y="6400800"/>
-            <a:ext cx="3410712" cy="274320"/>
-          </a:xfrm>
-          <a:prstGeom prst="rect">
-            <a:avLst/>
-          </a:prstGeom>
-          <a:noFill/>
-        </p:spPr>
-        <p:txBody>
-          <a:bodyPr wrap="square" anchor="t" lIns="0" rIns="0" tIns="0" bIns="0">
-            <a:spAutoFit/>
-          </a:bodyPr>
-          <a:lstStyle/>
-          <a:p>
-            <a:pPr algn="r">
-              <a:spcAft>
-                <a:spcPts val="450"/>
-              </a:spcAft>
-            </a:pPr>
-            <a:r>
-              <a:rPr sz="1000" b="0" i="0">
-                <a:solidFill>
-                  <a:srgbClr val="5D5A54"/>
-                </a:solidFill>
-                <a:latin typeface="Inter Tight"/>
-              </a:rPr>
-              <a:t>Beaver Counseling</a:t>
-            </a:r>
-          </a:p>
-        </p:txBody>
-      </p:sp>
-      <p:sp>
-        <p:nvSpPr>
-          <p:cNvPr id="5" name="TextBox 4"/>
-          <p:cNvSpPr txBox="1"/>
-          <p:nvPr/>
-        </p:nvSpPr>
-        <p:spPr>
-          <a:xfrm>
-            <a:off x="822960" y="2011680"/>
-            <a:ext cx="10515600" cy="1463040"/>
-          </a:xfrm>
-          <a:prstGeom prst="rect">
-            <a:avLst/>
-          </a:prstGeom>
-          <a:noFill/>
-        </p:spPr>
-        <p:txBody>
-          <a:bodyPr wrap="square" anchor="b" lIns="0" rIns="0" tIns="0" bIns="0">
-            <a:spAutoFit/>
-          </a:bodyPr>
-          <a:lstStyle/>
-          <a:p>
-            <a:pPr algn="l">
-              <a:spcAft>
-                <a:spcPts val="2700"/>
-              </a:spcAft>
-            </a:pPr>
-            <a:r>
-              <a:rPr sz="6000" b="1" i="0">
-                <a:solidFill>
-                  <a:srgbClr val="FFFFFF"/>
-                </a:solidFill>
-                <a:latin typeface="Source Serif 4"/>
-              </a:rPr>
-              <a:t>Perfect Is a Trap</a:t>
-            </a:r>
-          </a:p>
-        </p:txBody>
-      </p:sp>
-      <p:sp>
-        <p:nvSpPr>
-          <p:cNvPr id="6" name="TextBox 5"/>
-          <p:cNvSpPr txBox="1"/>
-          <p:nvPr/>
-        </p:nvSpPr>
-        <p:spPr>
-          <a:xfrm>
-            <a:off x="822960" y="3611880"/>
-            <a:ext cx="10515600" cy="914400"/>
-          </a:xfrm>
-          <a:prstGeom prst="rect">
-            <a:avLst/>
-          </a:prstGeom>
-          <a:noFill/>
-        </p:spPr>
-        <p:txBody>
-          <a:bodyPr wrap="square" anchor="t" lIns="0" rIns="0" tIns="0" bIns="0">
-            <a:spAutoFit/>
-          </a:bodyPr>
-          <a:lstStyle/>
-          <a:p>
-            <a:pPr algn="l">
-              <a:spcAft>
-                <a:spcPts val="1080"/>
-              </a:spcAft>
-            </a:pPr>
-            <a:r>
-              <a:rPr sz="2400" b="0" i="1">
-                <a:solidFill>
-                  <a:srgbClr val="E8E4DA"/>
-                </a:solidFill>
-                <a:latin typeface="Source Serif 4"/>
-              </a:rPr>
-              <a:t>Keep the high bar. Drop the part that hurts.</a:t>
-            </a:r>
-          </a:p>
-        </p:txBody>
-      </p:sp>
-      <p:sp>
-        <p:nvSpPr>
-          <p:cNvPr id="7" name="TextBox 6"/>
-          <p:cNvSpPr txBox="1"/>
-          <p:nvPr/>
-        </p:nvSpPr>
-        <p:spPr>
-          <a:xfrm>
-            <a:off x="822960" y="6035040"/>
-            <a:ext cx="7315200" cy="365760"/>
-          </a:xfrm>
-          <a:prstGeom prst="rect">
-            <a:avLst/>
-          </a:prstGeom>
-          <a:noFill/>
-        </p:spPr>
-        <p:txBody>
-          <a:bodyPr wrap="square" anchor="t" lIns="0" rIns="0" tIns="0" bIns="0">
-            <a:spAutoFit/>
-          </a:bodyPr>
-          <a:lstStyle/>
-          <a:p>
-            <a:pPr algn="l">
-              <a:spcAft>
-                <a:spcPts val="585"/>
-              </a:spcAft>
-            </a:pPr>
-            <a:r>
-              <a:rPr sz="1300" b="0" i="0">
-                <a:solidFill>
-                  <a:srgbClr val="E8E4DA"/>
-                </a:solidFill>
-                <a:latin typeface="Inter Tight"/>
-              </a:rPr>
-              <a:t>Beaver Upper School · Counseling</a:t>
+              <a:t>41,641 college students in the U.S., Canada and the U.K., 1989 to 2016.</a:t>
             </a:r>
           </a:p>
         </p:txBody>
@@ -6902,7 +7136,7 @@
                 </a:solidFill>
                 <a:latin typeface="Inter Tight"/>
               </a:rPr>
-              <a:t>SOUND FAMILIAR?</a:t>
+              <a:t>WHICH THOUGHT IS THE TRAP?</a:t>
             </a:r>
           </a:p>
         </p:txBody>
@@ -6948,23 +7182,64 @@
       </p:sp>
       <p:sp>
         <p:nvSpPr>
-          <p:cNvPr id="5" name="Rectangle 4"/>
+          <p:cNvPr id="5" name="TextBox 4"/>
+          <p:cNvSpPr txBox="1"/>
+          <p:nvPr/>
+        </p:nvSpPr>
+        <p:spPr>
+          <a:xfrm>
+            <a:off x="822960" y="1005840"/>
+            <a:ext cx="10515600" cy="914400"/>
+          </a:xfrm>
+          <a:prstGeom prst="rect">
+            <a:avLst/>
+          </a:prstGeom>
+          <a:noFill/>
+        </p:spPr>
+        <p:txBody>
+          <a:bodyPr wrap="square" anchor="t" lIns="0" rIns="0" tIns="0" bIns="0">
+            <a:spAutoFit/>
+          </a:bodyPr>
+          <a:lstStyle/>
+          <a:p>
+            <a:pPr algn="l">
+              <a:spcAft>
+                <a:spcPts val="1530"/>
+              </a:spcAft>
+            </a:pPr>
+            <a:r>
+              <a:rPr sz="3400" b="1" i="0">
+                <a:solidFill>
+                  <a:srgbClr val="1C1B19"/>
+                </a:solidFill>
+                <a:latin typeface="Source Serif 4"/>
+              </a:rPr>
+              <a:t>Three situations. Talk it through in pairs.</a:t>
+            </a:r>
+          </a:p>
+        </p:txBody>
+      </p:sp>
+      <p:sp>
+        <p:nvSpPr>
+          <p:cNvPr id="6" name="Rectangle 5"/>
           <p:cNvSpPr/>
           <p:nvPr/>
         </p:nvSpPr>
         <p:spPr>
           <a:xfrm>
-            <a:off x="822960" y="1371600"/>
-            <a:ext cx="73152" cy="3566160"/>
+            <a:off x="822960" y="2103120"/>
+            <a:ext cx="3322320" cy="3840480"/>
           </a:xfrm>
           <a:prstGeom prst="rect">
             <a:avLst/>
           </a:prstGeom>
           <a:solidFill>
-            <a:srgbClr val="F47B20"/>
+            <a:srgbClr val="FFFFFF"/>
           </a:solidFill>
-          <a:ln>
-            <a:noFill/>
+          <a:ln w="15875">
+            <a:solidFill>
+              <a:srgbClr val="D8D2C6"/>
+            </a:solidFill>
           </a:ln>
           <a:effectLst/>
         </p:spPr>
@@ -6992,14 +7267,14 @@
       </p:sp>
       <p:sp>
         <p:nvSpPr>
-          <p:cNvPr id="6" name="TextBox 5"/>
+          <p:cNvPr id="7" name="TextBox 6"/>
           <p:cNvSpPr txBox="1"/>
           <p:nvPr/>
         </p:nvSpPr>
         <p:spPr>
           <a:xfrm>
-            <a:off x="1188720" y="1371600"/>
-            <a:ext cx="10058400" cy="3566160"/>
+            <a:off x="1051560" y="2286000"/>
+            <a:ext cx="2865120" cy="365760"/>
           </a:xfrm>
           <a:prstGeom prst="rect">
             <a:avLst/>
@@ -7007,38 +7282,38 @@
           <a:noFill/>
         </p:spPr>
         <p:txBody>
-          <a:bodyPr wrap="square" anchor="ctr" lIns="0" rIns="0" tIns="0" bIns="0">
+          <a:bodyPr wrap="square" anchor="t" lIns="0" rIns="0" tIns="0" bIns="0">
             <a:spAutoFit/>
           </a:bodyPr>
           <a:lstStyle/>
           <a:p>
             <a:pPr algn="l">
               <a:spcAft>
-                <a:spcPts val="1800"/>
-              </a:spcAft>
-            </a:pPr>
-            <a:r>
-              <a:rPr sz="4000" b="0" i="1">
-                <a:solidFill>
-                  <a:srgbClr val="1C1B19"/>
-                </a:solidFill>
-                <a:latin typeface="Source Serif 4"/>
-              </a:rPr>
-              <a:t>Stand up if this has happened to you this year.</a:t>
-            </a:r>
-          </a:p>
-        </p:txBody>
-      </p:sp>
-      <p:sp>
-        <p:nvSpPr>
-          <p:cNvPr id="7" name="TextBox 6"/>
+                <a:spcPts val="585"/>
+              </a:spcAft>
+            </a:pPr>
+            <a:r>
+              <a:rPr sz="1300" b="1" i="0">
+                <a:solidFill>
+                  <a:srgbClr val="0B2D5B"/>
+                </a:solidFill>
+                <a:latin typeface="Inter Tight"/>
+              </a:rPr>
+              <a:t>AMARA, JUNIOR</a:t>
+            </a:r>
+          </a:p>
+        </p:txBody>
+      </p:sp>
+      <p:sp>
+        <p:nvSpPr>
+          <p:cNvPr id="8" name="TextBox 7"/>
           <p:cNvSpPr txBox="1"/>
           <p:nvPr/>
         </p:nvSpPr>
         <p:spPr>
           <a:xfrm>
-            <a:off x="1188720" y="5120640"/>
-            <a:ext cx="10058400" cy="914400"/>
+            <a:off x="1051560" y="2743200"/>
+            <a:ext cx="2865120" cy="3017520"/>
           </a:xfrm>
           <a:prstGeom prst="rect">
             <a:avLst/>
@@ -7059,11 +7334,259 @@
             <a:r>
               <a:rPr sz="1800" b="0" i="0">
                 <a:solidFill>
-                  <a:srgbClr val="5D5A54"/>
+                  <a:srgbClr val="1C1B19"/>
+                </a:solidFill>
+                <a:latin typeface="Source Serif 4"/>
+              </a:rPr>
+              <a:t>Applying for a summer internship. She's rewritten the short paragraph about herself nine times, and it's due tonight.</a:t>
+            </a:r>
+          </a:p>
+        </p:txBody>
+      </p:sp>
+      <p:sp>
+        <p:nvSpPr>
+          <p:cNvPr id="9" name="Rectangle 8"/>
+          <p:cNvSpPr/>
+          <p:nvPr/>
+        </p:nvSpPr>
+        <p:spPr>
+          <a:xfrm>
+            <a:off x="4419600" y="2103120"/>
+            <a:ext cx="3322320" cy="3840480"/>
+          </a:xfrm>
+          <a:prstGeom prst="rect">
+            <a:avLst/>
+          </a:prstGeom>
+          <a:solidFill>
+            <a:srgbClr val="FFFFFF"/>
+          </a:solidFill>
+          <a:ln w="15875">
+            <a:solidFill>
+              <a:srgbClr val="D8D2C6"/>
+            </a:solidFill>
+          </a:ln>
+          <a:effectLst/>
+        </p:spPr>
+        <p:style>
+          <a:lnRef idx="1">
+            <a:schemeClr val="accent1"/>
+          </a:lnRef>
+          <a:fillRef idx="3">
+            <a:schemeClr val="accent1"/>
+          </a:fillRef>
+          <a:effectRef idx="2">
+            <a:schemeClr val="accent1"/>
+          </a:effectRef>
+          <a:fontRef idx="minor">
+            <a:schemeClr val="lt1"/>
+          </a:fontRef>
+        </p:style>
+        <p:txBody>
+          <a:bodyPr rtlCol="0" anchor="ctr"/>
+          <a:lstStyle/>
+          <a:p>
+            <a:pPr algn="ctr"/>
+          </a:p>
+        </p:txBody>
+      </p:sp>
+      <p:sp>
+        <p:nvSpPr>
+          <p:cNvPr id="10" name="TextBox 9"/>
+          <p:cNvSpPr txBox="1"/>
+          <p:nvPr/>
+        </p:nvSpPr>
+        <p:spPr>
+          <a:xfrm>
+            <a:off x="4648200" y="2286000"/>
+            <a:ext cx="2865120" cy="365760"/>
+          </a:xfrm>
+          <a:prstGeom prst="rect">
+            <a:avLst/>
+          </a:prstGeom>
+          <a:noFill/>
+        </p:spPr>
+        <p:txBody>
+          <a:bodyPr wrap="square" anchor="t" lIns="0" rIns="0" tIns="0" bIns="0">
+            <a:spAutoFit/>
+          </a:bodyPr>
+          <a:lstStyle/>
+          <a:p>
+            <a:pPr algn="l">
+              <a:spcAft>
+                <a:spcPts val="585"/>
+              </a:spcAft>
+            </a:pPr>
+            <a:r>
+              <a:rPr sz="1300" b="1" i="0">
+                <a:solidFill>
+                  <a:srgbClr val="0B2D5B"/>
                 </a:solidFill>
                 <a:latin typeface="Inter Tight"/>
               </a:rPr>
-              <a:t>Sit back down after each one. Staying seated is always fine.</a:t>
+              <a:t>DIEGO, SOPHOMORE</a:t>
+            </a:r>
+          </a:p>
+        </p:txBody>
+      </p:sp>
+      <p:sp>
+        <p:nvSpPr>
+          <p:cNvPr id="11" name="TextBox 10"/>
+          <p:cNvSpPr txBox="1"/>
+          <p:nvPr/>
+        </p:nvSpPr>
+        <p:spPr>
+          <a:xfrm>
+            <a:off x="4648200" y="2743200"/>
+            <a:ext cx="2865120" cy="3017520"/>
+          </a:xfrm>
+          <a:prstGeom prst="rect">
+            <a:avLst/>
+          </a:prstGeom>
+          <a:noFill/>
+        </p:spPr>
+        <p:txBody>
+          <a:bodyPr wrap="square" anchor="t" lIns="0" rIns="0" tIns="0" bIns="0">
+            <a:spAutoFit/>
+          </a:bodyPr>
+          <a:lstStyle/>
+          <a:p>
+            <a:pPr algn="l">
+              <a:spcAft>
+                <a:spcPts val="810"/>
+              </a:spcAft>
+            </a:pPr>
+            <a:r>
+              <a:rPr sz="1800" b="0" i="0">
+                <a:solidFill>
+                  <a:srgbClr val="1C1B19"/>
+                </a:solidFill>
+                <a:latin typeface="Source Serif 4"/>
+              </a:rPr>
+              <a:t>Studied hard for a chemistry test and got a B+. His first thought: "I'm just not a science person."</a:t>
+            </a:r>
+          </a:p>
+        </p:txBody>
+      </p:sp>
+      <p:sp>
+        <p:nvSpPr>
+          <p:cNvPr id="12" name="Rectangle 11"/>
+          <p:cNvSpPr/>
+          <p:nvPr/>
+        </p:nvSpPr>
+        <p:spPr>
+          <a:xfrm>
+            <a:off x="8016239" y="2103120"/>
+            <a:ext cx="3322320" cy="3840480"/>
+          </a:xfrm>
+          <a:prstGeom prst="rect">
+            <a:avLst/>
+          </a:prstGeom>
+          <a:solidFill>
+            <a:srgbClr val="FFFFFF"/>
+          </a:solidFill>
+          <a:ln w="15875">
+            <a:solidFill>
+              <a:srgbClr val="D8D2C6"/>
+            </a:solidFill>
+          </a:ln>
+          <a:effectLst/>
+        </p:spPr>
+        <p:style>
+          <a:lnRef idx="1">
+            <a:schemeClr val="accent1"/>
+          </a:lnRef>
+          <a:fillRef idx="3">
+            <a:schemeClr val="accent1"/>
+          </a:fillRef>
+          <a:effectRef idx="2">
+            <a:schemeClr val="accent1"/>
+          </a:effectRef>
+          <a:fontRef idx="minor">
+            <a:schemeClr val="lt1"/>
+          </a:fontRef>
+        </p:style>
+        <p:txBody>
+          <a:bodyPr rtlCol="0" anchor="ctr"/>
+          <a:lstStyle/>
+          <a:p>
+            <a:pPr algn="ctr"/>
+          </a:p>
+        </p:txBody>
+      </p:sp>
+      <p:sp>
+        <p:nvSpPr>
+          <p:cNvPr id="13" name="TextBox 12"/>
+          <p:cNvSpPr txBox="1"/>
+          <p:nvPr/>
+        </p:nvSpPr>
+        <p:spPr>
+          <a:xfrm>
+            <a:off x="8244839" y="2286000"/>
+            <a:ext cx="2865120" cy="365760"/>
+          </a:xfrm>
+          <a:prstGeom prst="rect">
+            <a:avLst/>
+          </a:prstGeom>
+          <a:noFill/>
+        </p:spPr>
+        <p:txBody>
+          <a:bodyPr wrap="square" anchor="t" lIns="0" rIns="0" tIns="0" bIns="0">
+            <a:spAutoFit/>
+          </a:bodyPr>
+          <a:lstStyle/>
+          <a:p>
+            <a:pPr algn="l">
+              <a:spcAft>
+                <a:spcPts val="585"/>
+              </a:spcAft>
+            </a:pPr>
+            <a:r>
+              <a:rPr sz="1300" b="1" i="0">
+                <a:solidFill>
+                  <a:srgbClr val="0B2D5B"/>
+                </a:solidFill>
+                <a:latin typeface="Inter Tight"/>
+              </a:rPr>
+              <a:t>WEN, SENIOR</a:t>
+            </a:r>
+          </a:p>
+        </p:txBody>
+      </p:sp>
+      <p:sp>
+        <p:nvSpPr>
+          <p:cNvPr id="14" name="TextBox 13"/>
+          <p:cNvSpPr txBox="1"/>
+          <p:nvPr/>
+        </p:nvSpPr>
+        <p:spPr>
+          <a:xfrm>
+            <a:off x="8244839" y="2743200"/>
+            <a:ext cx="2865120" cy="3017520"/>
+          </a:xfrm>
+          <a:prstGeom prst="rect">
+            <a:avLst/>
+          </a:prstGeom>
+          <a:noFill/>
+        </p:spPr>
+        <p:txBody>
+          <a:bodyPr wrap="square" anchor="t" lIns="0" rIns="0" tIns="0" bIns="0">
+            <a:spAutoFit/>
+          </a:bodyPr>
+          <a:lstStyle/>
+          <a:p>
+            <a:pPr algn="l">
+              <a:spcAft>
+                <a:spcPts val="810"/>
+              </a:spcAft>
+            </a:pPr>
+            <a:r>
+              <a:rPr sz="1800" b="0" i="0">
+                <a:solidFill>
+                  <a:srgbClr val="1C1B19"/>
+                </a:solidFill>
+                <a:latin typeface="Source Serif 4"/>
+              </a:rPr>
+              <a:t>The night before a group project is due, a partner sends a section with typos and a weak conclusion.</a:t>
             </a:r>
           </a:p>
         </p:txBody>
@@ -7172,7 +7695,7 @@
                 </a:solidFill>
                 <a:latin typeface="Inter Tight"/>
               </a:rPr>
-              <a:t>TWO PARTS</a:t>
+              <a:t>SET A DONE LINE</a:t>
             </a:r>
           </a:p>
         </p:txBody>
@@ -7218,64 +7741,23 @@
       </p:sp>
       <p:sp>
         <p:nvSpPr>
-          <p:cNvPr id="5" name="TextBox 4"/>
-          <p:cNvSpPr txBox="1"/>
-          <p:nvPr/>
-        </p:nvSpPr>
-        <p:spPr>
-          <a:xfrm>
-            <a:off x="822960" y="1005840"/>
-            <a:ext cx="10515600" cy="914400"/>
-          </a:xfrm>
-          <a:prstGeom prst="rect">
-            <a:avLst/>
-          </a:prstGeom>
-          <a:noFill/>
-        </p:spPr>
-        <p:txBody>
-          <a:bodyPr wrap="square" anchor="t" lIns="0" rIns="0" tIns="0" bIns="0">
-            <a:spAutoFit/>
-          </a:bodyPr>
-          <a:lstStyle/>
-          <a:p>
-            <a:pPr algn="l">
-              <a:spcAft>
-                <a:spcPts val="1530"/>
-              </a:spcAft>
-            </a:pPr>
-            <a:r>
-              <a:rPr sz="3400" b="1" i="0">
-                <a:solidFill>
-                  <a:srgbClr val="1C1B19"/>
-                </a:solidFill>
-                <a:latin typeface="Source Serif 4"/>
-              </a:rPr>
-              <a:t>Same standards. Different fuel.</a:t>
-            </a:r>
-          </a:p>
-        </p:txBody>
-      </p:sp>
-      <p:sp>
-        <p:nvSpPr>
-          <p:cNvPr id="6" name="Rectangle 5"/>
+          <p:cNvPr id="5" name="Rectangle 4"/>
           <p:cNvSpPr/>
           <p:nvPr/>
         </p:nvSpPr>
         <p:spPr>
           <a:xfrm>
-            <a:off x="822960" y="2103120"/>
-            <a:ext cx="5120640" cy="3931920"/>
+            <a:off x="822960" y="1371600"/>
+            <a:ext cx="73152" cy="3566160"/>
           </a:xfrm>
           <a:prstGeom prst="rect">
             <a:avLst/>
           </a:prstGeom>
           <a:solidFill>
-            <a:srgbClr val="FFFFFF"/>
+            <a:srgbClr val="F47B20"/>
           </a:solidFill>
-          <a:ln w="15875">
-            <a:solidFill>
-              <a:srgbClr val="D8D2C6"/>
-            </a:solidFill>
+          <a:ln>
+            <a:noFill/>
           </a:ln>
           <a:effectLst/>
         </p:spPr>
@@ -7303,14 +7785,14 @@
       </p:sp>
       <p:sp>
         <p:nvSpPr>
-          <p:cNvPr id="7" name="TextBox 6"/>
+          <p:cNvPr id="6" name="TextBox 5"/>
           <p:cNvSpPr txBox="1"/>
           <p:nvPr/>
         </p:nvSpPr>
         <p:spPr>
           <a:xfrm>
-            <a:off x="1097280" y="2286000"/>
-            <a:ext cx="4572000" cy="457200"/>
+            <a:off x="1188720" y="1371600"/>
+            <a:ext cx="10058400" cy="3566160"/>
           </a:xfrm>
           <a:prstGeom prst="rect">
             <a:avLst/>
@@ -7318,38 +7800,38 @@
           <a:noFill/>
         </p:spPr>
         <p:txBody>
-          <a:bodyPr wrap="square" anchor="t" lIns="0" rIns="0" tIns="0" bIns="0">
+          <a:bodyPr wrap="square" anchor="ctr" lIns="0" rIns="0" tIns="0" bIns="0">
             <a:spAutoFit/>
           </a:bodyPr>
           <a:lstStyle/>
           <a:p>
             <a:pPr algn="l">
               <a:spcAft>
-                <a:spcPts val="585"/>
-              </a:spcAft>
-            </a:pPr>
-            <a:r>
-              <a:rPr sz="1300" b="1" i="0">
-                <a:solidFill>
-                  <a:srgbClr val="0B2D5B"/>
-                </a:solidFill>
-                <a:latin typeface="Inter Tight"/>
-              </a:rPr>
-              <a:t>STRIVINGS: THE STANDARDS</a:t>
-            </a:r>
-          </a:p>
-        </p:txBody>
-      </p:sp>
-      <p:sp>
-        <p:nvSpPr>
-          <p:cNvPr id="8" name="TextBox 7"/>
+                <a:spcPts val="1800"/>
+              </a:spcAft>
+            </a:pPr>
+            <a:r>
+              <a:rPr sz="4000" b="0" i="1">
+                <a:solidFill>
+                  <a:srgbClr val="1C1B19"/>
+                </a:solidFill>
+                <a:latin typeface="Source Serif 4"/>
+              </a:rPr>
+              <a:t>Pick one thing you can't seem to finish.</a:t>
+            </a:r>
+          </a:p>
+        </p:txBody>
+      </p:sp>
+      <p:sp>
+        <p:nvSpPr>
+          <p:cNvPr id="7" name="TextBox 6"/>
           <p:cNvSpPr txBox="1"/>
           <p:nvPr/>
         </p:nvSpPr>
         <p:spPr>
           <a:xfrm>
-            <a:off x="1097280" y="2788920"/>
-            <a:ext cx="4572000" cy="3108960"/>
+            <a:off x="1188720" y="5120640"/>
+            <a:ext cx="10058400" cy="914400"/>
           </a:xfrm>
           <a:prstGeom prst="rect">
             <a:avLst/>
@@ -7364,237 +7846,17 @@
           <a:p>
             <a:pPr algn="l">
               <a:spcAft>
-                <a:spcPts val="855"/>
-              </a:spcAft>
-            </a:pPr>
-            <a:r>
-              <a:rPr sz="1900" b="0" i="0">
-                <a:solidFill>
-                  <a:srgbClr val="1C1B19"/>
-                </a:solidFill>
-                <a:latin typeface="Source Serif 4"/>
-              </a:rPr>
-              <a:t>High goals</a:t>
-            </a:r>
-          </a:p>
-          <a:p>
-            <a:pPr algn="l">
-              <a:spcAft>
-                <a:spcPts val="855"/>
-              </a:spcAft>
-            </a:pPr>
-            <a:r>
-              <a:rPr sz="1900" b="0" i="0">
-                <a:solidFill>
-                  <a:srgbClr val="1C1B19"/>
-                </a:solidFill>
-                <a:latin typeface="Source Serif 4"/>
-              </a:rPr>
-              <a:t>Working hard toward them</a:t>
-            </a:r>
-          </a:p>
-          <a:p>
-            <a:pPr algn="l">
-              <a:spcAft>
-                <a:spcPts val="855"/>
-              </a:spcAft>
-            </a:pPr>
-            <a:r>
-              <a:rPr sz="1900" b="0" i="0">
-                <a:solidFill>
-                  <a:srgbClr val="1C1B19"/>
-                </a:solidFill>
-                <a:latin typeface="Source Serif 4"/>
-              </a:rPr>
-              <a:t>"I want to do well."</a:t>
-            </a:r>
-          </a:p>
-          <a:p>
-            <a:pPr algn="l">
-              <a:spcAft>
-                <a:spcPts val="855"/>
-              </a:spcAft>
-            </a:pPr>
-            <a:r>
-              <a:rPr sz="1900" b="0" i="0">
-                <a:solidFill>
-                  <a:srgbClr val="1C1B19"/>
-                </a:solidFill>
-                <a:latin typeface="Source Serif 4"/>
-              </a:rPr>
-              <a:t>Tends to go with motivation</a:t>
-            </a:r>
-          </a:p>
-        </p:txBody>
-      </p:sp>
-      <p:sp>
-        <p:nvSpPr>
-          <p:cNvPr id="9" name="Rectangle 8"/>
-          <p:cNvSpPr/>
-          <p:nvPr/>
-        </p:nvSpPr>
-        <p:spPr>
-          <a:xfrm>
-            <a:off x="6309360" y="2103120"/>
-            <a:ext cx="5120640" cy="3931920"/>
-          </a:xfrm>
-          <a:prstGeom prst="rect">
-            <a:avLst/>
-          </a:prstGeom>
-          <a:solidFill>
-            <a:srgbClr val="FFFFFF"/>
-          </a:solidFill>
-          <a:ln w="15875">
-            <a:solidFill>
-              <a:srgbClr val="D8D2C6"/>
-            </a:solidFill>
-          </a:ln>
-          <a:effectLst/>
-        </p:spPr>
-        <p:style>
-          <a:lnRef idx="1">
-            <a:schemeClr val="accent1"/>
-          </a:lnRef>
-          <a:fillRef idx="3">
-            <a:schemeClr val="accent1"/>
-          </a:fillRef>
-          <a:effectRef idx="2">
-            <a:schemeClr val="accent1"/>
-          </a:effectRef>
-          <a:fontRef idx="minor">
-            <a:schemeClr val="lt1"/>
-          </a:fontRef>
-        </p:style>
-        <p:txBody>
-          <a:bodyPr rtlCol="0" anchor="ctr"/>
-          <a:lstStyle/>
-          <a:p>
-            <a:pPr algn="ctr"/>
-          </a:p>
-        </p:txBody>
-      </p:sp>
-      <p:sp>
-        <p:nvSpPr>
-          <p:cNvPr id="10" name="TextBox 9"/>
-          <p:cNvSpPr txBox="1"/>
-          <p:nvPr/>
-        </p:nvSpPr>
-        <p:spPr>
-          <a:xfrm>
-            <a:off x="6583680" y="2286000"/>
-            <a:ext cx="4572000" cy="457200"/>
-          </a:xfrm>
-          <a:prstGeom prst="rect">
-            <a:avLst/>
-          </a:prstGeom>
-          <a:noFill/>
-        </p:spPr>
-        <p:txBody>
-          <a:bodyPr wrap="square" anchor="t" lIns="0" rIns="0" tIns="0" bIns="0">
-            <a:spAutoFit/>
-          </a:bodyPr>
-          <a:lstStyle/>
-          <a:p>
-            <a:pPr algn="l">
-              <a:spcAft>
-                <a:spcPts val="585"/>
-              </a:spcAft>
-            </a:pPr>
-            <a:r>
-              <a:rPr sz="1300" b="1" i="0">
-                <a:solidFill>
-                  <a:srgbClr val="0B2D5B"/>
+                <a:spcPts val="810"/>
+              </a:spcAft>
+            </a:pPr>
+            <a:r>
+              <a:rPr sz="1800" b="0" i="0">
+                <a:solidFill>
+                  <a:srgbClr val="5D5A54"/>
                 </a:solidFill>
                 <a:latin typeface="Inter Tight"/>
               </a:rPr>
-              <a:t>CONCERNS: THE FEAR</a:t>
-            </a:r>
-          </a:p>
-        </p:txBody>
-      </p:sp>
-      <p:sp>
-        <p:nvSpPr>
-          <p:cNvPr id="11" name="TextBox 10"/>
-          <p:cNvSpPr txBox="1"/>
-          <p:nvPr/>
-        </p:nvSpPr>
-        <p:spPr>
-          <a:xfrm>
-            <a:off x="6583680" y="2788920"/>
-            <a:ext cx="4572000" cy="3108960"/>
-          </a:xfrm>
-          <a:prstGeom prst="rect">
-            <a:avLst/>
-          </a:prstGeom>
-          <a:noFill/>
-        </p:spPr>
-        <p:txBody>
-          <a:bodyPr wrap="square" anchor="t" lIns="0" rIns="0" tIns="0" bIns="0">
-            <a:spAutoFit/>
-          </a:bodyPr>
-          <a:lstStyle/>
-          <a:p>
-            <a:pPr algn="l">
-              <a:spcAft>
-                <a:spcPts val="855"/>
-              </a:spcAft>
-            </a:pPr>
-            <a:r>
-              <a:rPr sz="1900" b="0" i="0">
-                <a:solidFill>
-                  <a:srgbClr val="1C1B19"/>
-                </a:solidFill>
-                <a:latin typeface="Source Serif 4"/>
-              </a:rPr>
-              <a:t>Fear of mistakes</a:t>
-            </a:r>
-          </a:p>
-          <a:p>
-            <a:pPr algn="l">
-              <a:spcAft>
-                <a:spcPts val="855"/>
-              </a:spcAft>
-            </a:pPr>
-            <a:r>
-              <a:rPr sz="1900" b="0" i="0">
-                <a:solidFill>
-                  <a:srgbClr val="1C1B19"/>
-                </a:solidFill>
-                <a:latin typeface="Source Serif 4"/>
-              </a:rPr>
-              <a:t>Doubting it's ever good enough</a:t>
-            </a:r>
-          </a:p>
-          <a:p>
-            <a:pPr algn="l">
-              <a:spcAft>
-                <a:spcPts val="855"/>
-              </a:spcAft>
-            </a:pPr>
-            <a:r>
-              <a:rPr sz="1900" b="0" i="0">
-                <a:solidFill>
-                  <a:srgbClr val="1C1B19"/>
-                </a:solidFill>
-                <a:latin typeface="Source Serif 4"/>
-              </a:rPr>
-              <a:t>"They only accept me if I'm flawless."</a:t>
-            </a:r>
-          </a:p>
-          <a:p>
-            <a:pPr algn="l">
-              <a:spcAft>
-                <a:spcPts val="855"/>
-              </a:spcAft>
-            </a:pPr>
-            <a:r>
-              <a:rPr sz="1900" b="0" i="0">
-                <a:solidFill>
-                  <a:srgbClr val="1C1B19"/>
-                </a:solidFill>
-                <a:latin typeface="Source Serif 4"/>
-              </a:rPr>
-              <a:t>Tied to anxiety, burnout, avoidance</a:t>
+              <a:t>On a card, privately: what it's worth, what perfect would cost, and your done line.</a:t>
             </a:r>
           </a:p>
         </p:txBody>
@@ -7703,7 +7965,7 @@
                 </a:solidFill>
                 <a:latin typeface="Inter Tight"/>
               </a:rPr>
-              <a:t>IT ISN'T ONLY ABOUT YOU</a:t>
+              <a:t>BEFORE YOU GO</a:t>
             </a:r>
           </a:p>
         </p:txBody>
@@ -7755,8 +8017,8 @@
         </p:nvSpPr>
         <p:spPr>
           <a:xfrm>
-            <a:off x="822960" y="1463040"/>
-            <a:ext cx="10515600" cy="3291840"/>
+            <a:off x="822960" y="1188720"/>
+            <a:ext cx="10515600" cy="914400"/>
           </a:xfrm>
           <a:prstGeom prst="rect">
             <a:avLst/>
@@ -7764,24 +8026,24 @@
           <a:noFill/>
         </p:spPr>
         <p:txBody>
-          <a:bodyPr wrap="square" anchor="ctr" lIns="0" rIns="0" tIns="0" bIns="0">
+          <a:bodyPr wrap="square" anchor="t" lIns="0" rIns="0" tIns="0" bIns="0">
             <a:spAutoFit/>
           </a:bodyPr>
           <a:lstStyle/>
           <a:p>
             <a:pPr algn="l">
               <a:spcAft>
-                <a:spcPts val="2070"/>
-              </a:spcAft>
-            </a:pPr>
-            <a:r>
-              <a:rPr sz="4600" b="1" i="0">
+                <a:spcPts val="1620"/>
+              </a:spcAft>
+            </a:pPr>
+            <a:r>
+              <a:rPr sz="3600" b="1" i="0">
                 <a:solidFill>
                   <a:srgbClr val="1C1B19"/>
                 </a:solidFill>
                 <a:latin typeface="Source Serif 4"/>
               </a:rPr>
-              <a:t>The sense that others demand perfection rose about 33%.</a:t>
+              <a:t>Try one mistake experiment, if you want</a:t>
             </a:r>
           </a:p>
         </p:txBody>
@@ -7794,8 +8056,8 @@
         </p:nvSpPr>
         <p:spPr>
           <a:xfrm>
-            <a:off x="822960" y="4846320"/>
-            <a:ext cx="10515600" cy="1097280"/>
+            <a:off x="822960" y="2286000"/>
+            <a:ext cx="10515600" cy="1463040"/>
           </a:xfrm>
           <a:prstGeom prst="rect">
             <a:avLst/>
@@ -7810,66 +8072,42 @@
           <a:p>
             <a:pPr algn="l">
               <a:spcAft>
-                <a:spcPts val="990"/>
-              </a:spcAft>
-            </a:pPr>
-            <a:r>
-              <a:rPr sz="2200" b="0" i="1">
-                <a:solidFill>
-                  <a:srgbClr val="5D5A54"/>
+                <a:spcPts val="1080"/>
+              </a:spcAft>
+            </a:pPr>
+            <a:r>
+              <a:rPr sz="2400" b="0" i="0">
+                <a:solidFill>
+                  <a:srgbClr val="1C1B19"/>
                 </a:solidFill>
                 <a:latin typeface="Source Serif 4"/>
               </a:rPr>
-              <a:t>41,641 college students in the U.S., Canada and the U.K., 1989 to 2016.</a:t>
-            </a:r>
-          </a:p>
-        </p:txBody>
-      </p:sp>
-    </p:spTree>
-  </p:cSld>
-  <p:clrMapOvr>
-    <a:masterClrMapping/>
-  </p:clrMapOvr>
-</p:sld>
-</file>
-
-<file path=ppt/slides/slide9.xml><?xml version="1.0" encoding="utf-8"?>
-<p:sld xmlns:a="http://schemas.openxmlformats.org/drawingml/2006/main" xmlns:p="http://schemas.openxmlformats.org/presentationml/2006/main" xmlns:r="http://schemas.openxmlformats.org/officeDocument/2006/relationships">
-  <p:cSld>
-    <p:bg>
-      <p:bgPr>
-        <a:solidFill>
-          <a:srgbClr val="F7F4EE"/>
-        </a:solidFill>
-        <a:effectLst/>
-      </p:bgPr>
-    </p:bg>
-    <p:spTree>
-      <p:nvGrpSpPr>
-        <p:cNvPr id="1" name=""/>
-        <p:cNvGrpSpPr/>
-        <p:nvPr/>
-      </p:nvGrpSpPr>
-      <p:grpSpPr/>
-      <p:sp>
-        <p:nvSpPr>
-          <p:cNvPr id="2" name="Rectangle 1"/>
+              <a:t>Send the email after one read. Turn in the draft without the fifth pass. Predict what will happen, then check.</a:t>
+            </a:r>
+          </a:p>
+        </p:txBody>
+      </p:sp>
+      <p:sp>
+        <p:nvSpPr>
+          <p:cNvPr id="7" name="Rectangle 6"/>
           <p:cNvSpPr/>
           <p:nvPr/>
         </p:nvSpPr>
         <p:spPr>
           <a:xfrm>
-            <a:off x="548640" y="502920"/>
-            <a:ext cx="457200" cy="54864"/>
+            <a:off x="822960" y="4023360"/>
+            <a:ext cx="10515600" cy="1371600"/>
           </a:xfrm>
           <a:prstGeom prst="rect">
             <a:avLst/>
           </a:prstGeom>
           <a:solidFill>
-            <a:srgbClr val="F47B20"/>
+            <a:srgbClr val="FFFFFF"/>
           </a:solidFill>
-          <a:ln>
-            <a:noFill/>
+          <a:ln w="15875">
+            <a:solidFill>
+              <a:srgbClr val="1C1B19"/>
+            </a:solidFill>
           </a:ln>
           <a:effectLst/>
         </p:spPr>
@@ -7897,14 +8135,14 @@
       </p:sp>
       <p:sp>
         <p:nvSpPr>
-          <p:cNvPr id="3" name="TextBox 2"/>
+          <p:cNvPr id="8" name="TextBox 7"/>
           <p:cNvSpPr txBox="1"/>
           <p:nvPr/>
         </p:nvSpPr>
         <p:spPr>
           <a:xfrm>
-            <a:off x="1143000" y="393192"/>
-            <a:ext cx="8229600" cy="274320"/>
+            <a:off x="1097280" y="4206240"/>
+            <a:ext cx="10058400" cy="365760"/>
           </a:xfrm>
           <a:prstGeom prst="rect">
             <a:avLst/>
@@ -7925,25 +8163,25 @@
             <a:r>
               <a:rPr sz="1200" b="1" i="0">
                 <a:solidFill>
-                  <a:srgbClr val="5D5A54"/>
+                  <a:srgbClr val="0B2D5B"/>
                 </a:solidFill>
                 <a:latin typeface="Inter Tight"/>
               </a:rPr>
-              <a:t>WHICH THOUGHT IS THE TRAP?</a:t>
-            </a:r>
-          </a:p>
-        </p:txBody>
-      </p:sp>
-      <p:sp>
-        <p:nvSpPr>
-          <p:cNvPr id="4" name="TextBox 3"/>
+              <a:t>STUDENT PAGE</a:t>
+            </a:r>
+          </a:p>
+        </p:txBody>
+      </p:sp>
+      <p:sp>
+        <p:nvSpPr>
+          <p:cNvPr id="9" name="TextBox 8"/>
           <p:cNvSpPr txBox="1"/>
           <p:nvPr/>
         </p:nvSpPr>
         <p:spPr>
           <a:xfrm>
-            <a:off x="8229600" y="6400800"/>
-            <a:ext cx="3410712" cy="274320"/>
+            <a:off x="1097280" y="4617720"/>
+            <a:ext cx="10058400" cy="640080"/>
           </a:xfrm>
           <a:prstGeom prst="rect">
             <a:avLst/>
@@ -7956,83 +8194,68 @@
           </a:bodyPr>
           <a:lstStyle/>
           <a:p>
-            <a:pPr algn="r">
-              <a:spcAft>
-                <a:spcPts val="450"/>
-              </a:spcAft>
-            </a:pPr>
-            <a:r>
-              <a:rPr sz="1000" b="0" i="0">
-                <a:solidFill>
-                  <a:srgbClr val="5D5A54"/>
+            <a:pPr algn="l">
+              <a:spcAft>
+                <a:spcPts val="900"/>
+              </a:spcAft>
+            </a:pPr>
+            <a:r>
+              <a:rPr sz="2000" b="0" i="0">
+                <a:solidFill>
+                  <a:srgbClr val="1C1B19"/>
                 </a:solidFill>
                 <a:latin typeface="Inter Tight"/>
               </a:rPr>
-              <a:t>Beaver Counseling</a:t>
-            </a:r>
-          </a:p>
-        </p:txBody>
-      </p:sp>
-      <p:sp>
-        <p:nvSpPr>
-          <p:cNvPr id="5" name="TextBox 4"/>
-          <p:cNvSpPr txBox="1"/>
-          <p:nvPr/>
-        </p:nvSpPr>
-        <p:spPr>
-          <a:xfrm>
-            <a:off x="822960" y="1005840"/>
-            <a:ext cx="10515600" cy="914400"/>
-          </a:xfrm>
-          <a:prstGeom prst="rect">
-            <a:avLst/>
-          </a:prstGeom>
-          <a:noFill/>
-        </p:spPr>
-        <p:txBody>
-          <a:bodyPr wrap="square" anchor="t" lIns="0" rIns="0" tIns="0" bIns="0">
-            <a:spAutoFit/>
-          </a:bodyPr>
-          <a:lstStyle/>
-          <a:p>
-            <a:pPr algn="l">
-              <a:spcAft>
-                <a:spcPts val="1530"/>
-              </a:spcAft>
-            </a:pPr>
-            <a:r>
-              <a:rPr sz="3400" b="1" i="0">
-                <a:solidFill>
-                  <a:srgbClr val="1C1B19"/>
-                </a:solidFill>
-                <a:latin typeface="Source Serif 4"/>
-              </a:rPr>
-              <a:t>Three situations. Talk it through in pairs.</a:t>
-            </a:r>
-          </a:p>
-        </p:txBody>
-      </p:sp>
-      <p:sp>
-        <p:nvSpPr>
-          <p:cNvPr id="6" name="Rectangle 5"/>
+              <a:t>https://rmwtoolkit.github.io/bcds-toolkit/perfect-is-a-trap-high-school.html</a:t>
+            </a:r>
+          </a:p>
+        </p:txBody>
+      </p:sp>
+    </p:spTree>
+  </p:cSld>
+  <p:clrMapOvr>
+    <a:masterClrMapping/>
+  </p:clrMapOvr>
+</p:sld>
+</file>
+
+<file path=ppt/slides/slide9.xml><?xml version="1.0" encoding="utf-8"?>
+<p:sld xmlns:a="http://schemas.openxmlformats.org/drawingml/2006/main" xmlns:p="http://schemas.openxmlformats.org/presentationml/2006/main" xmlns:r="http://schemas.openxmlformats.org/officeDocument/2006/relationships" show="0">
+  <p:cSld>
+    <p:bg>
+      <p:bgPr>
+        <a:solidFill>
+          <a:srgbClr val="EEEBE4"/>
+        </a:solidFill>
+        <a:effectLst/>
+      </p:bgPr>
+    </p:bg>
+    <p:spTree>
+      <p:nvGrpSpPr>
+        <p:cNvPr id="1" name=""/>
+        <p:cNvGrpSpPr/>
+        <p:nvPr/>
+      </p:nvGrpSpPr>
+      <p:grpSpPr/>
+      <p:sp>
+        <p:nvSpPr>
+          <p:cNvPr id="2" name="Rectangle 1"/>
           <p:cNvSpPr/>
           <p:nvPr/>
         </p:nvSpPr>
         <p:spPr>
           <a:xfrm>
-            <a:off x="822960" y="2103120"/>
-            <a:ext cx="3322320" cy="3840480"/>
+            <a:off x="0" y="0"/>
+            <a:ext cx="12191695" cy="384048"/>
           </a:xfrm>
           <a:prstGeom prst="rect">
             <a:avLst/>
           </a:prstGeom>
           <a:solidFill>
-            <a:srgbClr val="FFFFFF"/>
+            <a:srgbClr val="0B2D5B"/>
           </a:solidFill>
-          <a:ln w="15875">
-            <a:solidFill>
-              <a:srgbClr val="D8D2C6"/>
-            </a:solidFill>
+          <a:ln>
+            <a:noFill/>
           </a:ln>
           <a:effectLst/>
         </p:spPr>
@@ -8060,14 +8283,14 @@
       </p:sp>
       <p:sp>
         <p:nvSpPr>
-          <p:cNvPr id="7" name="TextBox 6"/>
+          <p:cNvPr id="3" name="TextBox 2"/>
           <p:cNvSpPr txBox="1"/>
           <p:nvPr/>
         </p:nvSpPr>
         <p:spPr>
           <a:xfrm>
-            <a:off x="1051560" y="2286000"/>
-            <a:ext cx="2865120" cy="365760"/>
+            <a:off x="548640" y="100584"/>
+            <a:ext cx="10972800" cy="274320"/>
           </a:xfrm>
           <a:prstGeom prst="rect">
             <a:avLst/>
@@ -8082,31 +8305,31 @@
           <a:p>
             <a:pPr algn="l">
               <a:spcAft>
-                <a:spcPts val="585"/>
-              </a:spcAft>
-            </a:pPr>
-            <a:r>
-              <a:rPr sz="1300" b="1" i="0">
-                <a:solidFill>
-                  <a:srgbClr val="0B2D5B"/>
+                <a:spcPts val="495"/>
+              </a:spcAft>
+            </a:pPr>
+            <a:r>
+              <a:rPr sz="1100" b="1" i="0">
+                <a:solidFill>
+                  <a:srgbClr val="FFFFFF"/>
                 </a:solidFill>
                 <a:latin typeface="Inter Tight"/>
               </a:rPr>
-              <a:t>AMARA, JUNIOR</a:t>
-            </a:r>
-          </a:p>
-        </p:txBody>
-      </p:sp>
-      <p:sp>
-        <p:nvSpPr>
-          <p:cNvPr id="8" name="TextBox 7"/>
+              <a:t>TEACHER PAGE  ·  skipped when you present  ·  Lesson plan</a:t>
+            </a:r>
+          </a:p>
+        </p:txBody>
+      </p:sp>
+      <p:sp>
+        <p:nvSpPr>
+          <p:cNvPr id="4" name="TextBox 3"/>
           <p:cNvSpPr txBox="1"/>
           <p:nvPr/>
         </p:nvSpPr>
         <p:spPr>
           <a:xfrm>
-            <a:off x="1051560" y="2743200"/>
-            <a:ext cx="2865120" cy="3017520"/>
+            <a:off x="548640" y="685800"/>
+            <a:ext cx="10972800" cy="731520"/>
           </a:xfrm>
           <a:prstGeom prst="rect">
             <a:avLst/>
@@ -8121,77 +8344,31 @@
           <a:p>
             <a:pPr algn="l">
               <a:spcAft>
-                <a:spcPts val="810"/>
-              </a:spcAft>
-            </a:pPr>
-            <a:r>
-              <a:rPr sz="1800" b="0" i="0">
+                <a:spcPts val="1530"/>
+              </a:spcAft>
+            </a:pPr>
+            <a:r>
+              <a:rPr sz="3400" b="1" i="0">
                 <a:solidFill>
                   <a:srgbClr val="1C1B19"/>
                 </a:solidFill>
                 <a:latin typeface="Source Serif 4"/>
               </a:rPr>
-              <a:t>Applying for a summer internship. She's rewritten the short paragraph about herself nine times, and it's due tonight.</a:t>
-            </a:r>
-          </a:p>
-        </p:txBody>
-      </p:sp>
-      <p:sp>
-        <p:nvSpPr>
-          <p:cNvPr id="9" name="Rectangle 8"/>
-          <p:cNvSpPr/>
-          <p:nvPr/>
-        </p:nvSpPr>
-        <p:spPr>
-          <a:xfrm>
-            <a:off x="4419600" y="2103120"/>
-            <a:ext cx="3322320" cy="3840480"/>
-          </a:xfrm>
-          <a:prstGeom prst="rect">
-            <a:avLst/>
-          </a:prstGeom>
-          <a:solidFill>
-            <a:srgbClr val="FFFFFF"/>
-          </a:solidFill>
-          <a:ln w="15875">
-            <a:solidFill>
-              <a:srgbClr val="D8D2C6"/>
-            </a:solidFill>
-          </a:ln>
-          <a:effectLst/>
-        </p:spPr>
-        <p:style>
-          <a:lnRef idx="1">
-            <a:schemeClr val="accent1"/>
-          </a:lnRef>
-          <a:fillRef idx="3">
-            <a:schemeClr val="accent1"/>
-          </a:fillRef>
-          <a:effectRef idx="2">
-            <a:schemeClr val="accent1"/>
-          </a:effectRef>
-          <a:fontRef idx="minor">
-            <a:schemeClr val="lt1"/>
-          </a:fontRef>
-        </p:style>
-        <p:txBody>
-          <a:bodyPr rtlCol="0" anchor="ctr"/>
-          <a:lstStyle/>
-          <a:p>
-            <a:pPr algn="ctr"/>
-          </a:p>
-        </p:txBody>
-      </p:sp>
-      <p:sp>
-        <p:nvSpPr>
-          <p:cNvPr id="10" name="TextBox 9"/>
+              <a:t>Perfect Is a Trap</a:t>
+            </a:r>
+          </a:p>
+        </p:txBody>
+      </p:sp>
+      <p:sp>
+        <p:nvSpPr>
+          <p:cNvPr id="5" name="TextBox 4"/>
           <p:cNvSpPr txBox="1"/>
           <p:nvPr/>
         </p:nvSpPr>
         <p:spPr>
           <a:xfrm>
-            <a:off x="4648200" y="2286000"/>
-            <a:ext cx="2865120" cy="365760"/>
+            <a:off x="548640" y="1325880"/>
+            <a:ext cx="10972800" cy="365760"/>
           </a:xfrm>
           <a:prstGeom prst="rect">
             <a:avLst/>
@@ -8206,31 +8383,31 @@
           <a:p>
             <a:pPr algn="l">
               <a:spcAft>
-                <a:spcPts val="585"/>
-              </a:spcAft>
-            </a:pPr>
-            <a:r>
-              <a:rPr sz="1300" b="1" i="0">
-                <a:solidFill>
-                  <a:srgbClr val="0B2D5B"/>
+                <a:spcPts val="630"/>
+              </a:spcAft>
+            </a:pPr>
+            <a:r>
+              <a:rPr sz="1400" b="0" i="0">
+                <a:solidFill>
+                  <a:srgbClr val="5D5A54"/>
                 </a:solidFill>
                 <a:latin typeface="Inter Tight"/>
               </a:rPr>
-              <a:t>DIEGO, SOPHOMORE</a:t>
-            </a:r>
-          </a:p>
-        </p:txBody>
-      </p:sp>
-      <p:sp>
-        <p:nvSpPr>
-          <p:cNvPr id="11" name="TextBox 10"/>
+              <a:t>Upper School  ·  20 minutes (fits a 30-minute advisory, with time for your opening check-in; 10-minute version below)  ·  Any grade</a:t>
+            </a:r>
+          </a:p>
+        </p:txBody>
+      </p:sp>
+      <p:sp>
+        <p:nvSpPr>
+          <p:cNvPr id="6" name="TextBox 5"/>
           <p:cNvSpPr txBox="1"/>
           <p:nvPr/>
         </p:nvSpPr>
         <p:spPr>
           <a:xfrm>
-            <a:off x="4648200" y="2743200"/>
-            <a:ext cx="2865120" cy="3017520"/>
+            <a:off x="548640" y="1828800"/>
+            <a:ext cx="5120640" cy="4389120"/>
           </a:xfrm>
           <a:prstGeom prst="rect">
             <a:avLst/>
@@ -8245,77 +8422,127 @@
           <a:p>
             <a:pPr algn="l">
               <a:spcAft>
-                <a:spcPts val="810"/>
-              </a:spcAft>
-            </a:pPr>
-            <a:r>
-              <a:rPr sz="1800" b="0" i="0">
+                <a:spcPts val="675"/>
+              </a:spcAft>
+            </a:pPr>
+            <a:r>
+              <a:rPr sz="1100" b="1" i="0">
+                <a:solidFill>
+                  <a:srgbClr val="0B2D5B"/>
+                </a:solidFill>
+                <a:latin typeface="Inter Tight"/>
+              </a:rPr>
+              <a:t>GOAL</a:t>
+            </a:r>
+          </a:p>
+          <a:p>
+            <a:pPr algn="l">
+              <a:spcAft>
+                <a:spcPts val="675"/>
+              </a:spcAft>
+            </a:pPr>
+            <a:r>
+              <a:rPr sz="1500" b="0" i="0">
                 <a:solidFill>
                   <a:srgbClr val="1C1B19"/>
                 </a:solidFill>
                 <a:latin typeface="Source Serif 4"/>
               </a:rPr>
-              <a:t>Studied hard for a chemistry test and got a B+. His first thought: "I'm just not a science person."</a:t>
-            </a:r>
-          </a:p>
-        </p:txBody>
-      </p:sp>
-      <p:sp>
-        <p:nvSpPr>
-          <p:cNvPr id="12" name="Rectangle 11"/>
-          <p:cNvSpPr/>
-          <p:nvPr/>
-        </p:nvSpPr>
-        <p:spPr>
-          <a:xfrm>
-            <a:off x="8016239" y="2103120"/>
-            <a:ext cx="3322320" cy="3840480"/>
-          </a:xfrm>
-          <a:prstGeom prst="rect">
-            <a:avLst/>
-          </a:prstGeom>
-          <a:solidFill>
-            <a:srgbClr val="FFFFFF"/>
-          </a:solidFill>
-          <a:ln w="15875">
-            <a:solidFill>
-              <a:srgbClr val="D8D2C6"/>
-            </a:solidFill>
-          </a:ln>
-          <a:effectLst/>
-        </p:spPr>
-        <p:style>
-          <a:lnRef idx="1">
-            <a:schemeClr val="accent1"/>
-          </a:lnRef>
-          <a:fillRef idx="3">
-            <a:schemeClr val="accent1"/>
-          </a:fillRef>
-          <a:effectRef idx="2">
-            <a:schemeClr val="accent1"/>
-          </a:effectRef>
-          <a:fontRef idx="minor">
-            <a:schemeClr val="lt1"/>
-          </a:fontRef>
-        </p:style>
-        <p:txBody>
-          <a:bodyPr rtlCol="0" anchor="ctr"/>
-          <a:lstStyle/>
-          <a:p>
-            <a:pPr algn="ctr"/>
-          </a:p>
-        </p:txBody>
-      </p:sp>
-      <p:sp>
-        <p:nvSpPr>
-          <p:cNvPr id="13" name="TextBox 12"/>
+              <a:t>Students can tell high standards apart from the fear of mistakes, set a done line on one real task, and pick a small mistake experiment if they want to try one. Nobody shares grades or scores.</a:t>
+            </a:r>
+          </a:p>
+          <a:p>
+            <a:pPr algn="l">
+              <a:spcAft>
+                <a:spcPts val="675"/>
+              </a:spcAft>
+            </a:pPr>
+            <a:r>
+              <a:rPr sz="1500" b="0" i="0">
+                <a:solidFill>
+                  <a:srgbClr val="1C1B19"/>
+                </a:solidFill>
+                <a:latin typeface="Source Serif 4"/>
+              </a:rPr>
+              <a:t/>
+            </a:r>
+          </a:p>
+          <a:p>
+            <a:pPr algn="l">
+              <a:spcAft>
+                <a:spcPts val="675"/>
+              </a:spcAft>
+            </a:pPr>
+            <a:r>
+              <a:rPr sz="1100" b="1" i="0">
+                <a:solidFill>
+                  <a:srgbClr val="0B2D5B"/>
+                </a:solidFill>
+                <a:latin typeface="Inter Tight"/>
+              </a:rPr>
+              <a:t>MATERIALS</a:t>
+            </a:r>
+          </a:p>
+          <a:p>
+            <a:pPr algn="l">
+              <a:spcAft>
+                <a:spcPts val="675"/>
+              </a:spcAft>
+            </a:pPr>
+            <a:r>
+              <a:rPr sz="1500" b="0" i="0">
+                <a:solidFill>
+                  <a:srgbClr val="1C1B19"/>
+                </a:solidFill>
+                <a:latin typeface="Source Serif 4"/>
+              </a:rPr>
+              <a:t>Index cards for the private done line</a:t>
+            </a:r>
+          </a:p>
+          <a:p>
+            <a:pPr algn="l">
+              <a:spcAft>
+                <a:spcPts val="675"/>
+              </a:spcAft>
+            </a:pPr>
+            <a:r>
+              <a:rPr sz="1500" b="0" i="0">
+                <a:solidFill>
+                  <a:srgbClr val="1C1B19"/>
+                </a:solidFill>
+                <a:latin typeface="Source Serif 4"/>
+              </a:rPr>
+              <a:t>Open floor space for the stand-up, sit-down opener</a:t>
+            </a:r>
+          </a:p>
+          <a:p>
+            <a:pPr algn="l">
+              <a:spcAft>
+                <a:spcPts val="675"/>
+              </a:spcAft>
+            </a:pPr>
+            <a:r>
+              <a:rPr sz="1500" b="0" i="0">
+                <a:solidFill>
+                  <a:srgbClr val="1C1B19"/>
+                </a:solidFill>
+                <a:latin typeface="Source Serif 4"/>
+              </a:rPr>
+              <a:t>The student page link (last slide) to share after advisory</a:t>
+            </a:r>
+          </a:p>
+        </p:txBody>
+      </p:sp>
+      <p:sp>
+        <p:nvSpPr>
+          <p:cNvPr id="7" name="TextBox 6"/>
           <p:cNvSpPr txBox="1"/>
           <p:nvPr/>
         </p:nvSpPr>
         <p:spPr>
           <a:xfrm>
-            <a:off x="8244839" y="2286000"/>
-            <a:ext cx="2865120" cy="365760"/>
+            <a:off x="6126480" y="1828800"/>
+            <a:ext cx="5486400" cy="4389120"/>
           </a:xfrm>
           <a:prstGeom prst="rect">
             <a:avLst/>
@@ -8330,56 +8557,190 @@
           <a:p>
             <a:pPr algn="l">
               <a:spcAft>
-                <a:spcPts val="585"/>
+                <a:spcPts val="630"/>
+              </a:spcAft>
+            </a:pPr>
+            <a:r>
+              <a:rPr sz="1100" b="1" i="0">
+                <a:solidFill>
+                  <a:srgbClr val="0B2D5B"/>
+                </a:solidFill>
+                <a:latin typeface="Inter Tight"/>
+              </a:rPr>
+              <a:t>FLOW</a:t>
+            </a:r>
+          </a:p>
+          <a:p>
+            <a:pPr algn="l">
+              <a:spcAft>
+                <a:spcPts val="630"/>
               </a:spcAft>
             </a:pPr>
             <a:r>
               <a:rPr sz="1300" b="1" i="0">
                 <a:solidFill>
+                  <a:srgbClr val="F47B20"/>
+                </a:solidFill>
+                <a:latin typeface="Inter Tight"/>
+              </a:rPr>
+              <a:t>4 min   </a:t>
+            </a:r>
+            <a:r>
+              <a:rPr sz="1400" b="0" i="0">
+                <a:solidFill>
+                  <a:srgbClr val="1C1B19"/>
+                </a:solidFill>
+                <a:latin typeface="Source Serif 4"/>
+              </a:rPr>
+              <a:t>Sound familiar? (stand up, sit down)</a:t>
+            </a:r>
+          </a:p>
+          <a:p>
+            <a:pPr algn="l">
+              <a:spcAft>
+                <a:spcPts val="630"/>
+              </a:spcAft>
+            </a:pPr>
+            <a:r>
+              <a:rPr sz="1300" b="1" i="0">
+                <a:solidFill>
+                  <a:srgbClr val="F47B20"/>
+                </a:solidFill>
+                <a:latin typeface="Inter Tight"/>
+              </a:rPr>
+              <a:t>6 min   </a:t>
+            </a:r>
+            <a:r>
+              <a:rPr sz="1400" b="0" i="0">
+                <a:solidFill>
+                  <a:srgbClr val="1C1B19"/>
+                </a:solidFill>
+                <a:latin typeface="Source Serif 4"/>
+              </a:rPr>
+              <a:t>Two parts, and why it's rising</a:t>
+            </a:r>
+          </a:p>
+          <a:p>
+            <a:pPr algn="l">
+              <a:spcAft>
+                <a:spcPts val="630"/>
+              </a:spcAft>
+            </a:pPr>
+            <a:r>
+              <a:rPr sz="1300" b="1" i="0">
+                <a:solidFill>
+                  <a:srgbClr val="F47B20"/>
+                </a:solidFill>
+                <a:latin typeface="Inter Tight"/>
+              </a:rPr>
+              <a:t>5 min   </a:t>
+            </a:r>
+            <a:r>
+              <a:rPr sz="1400" b="0" i="0">
+                <a:solidFill>
+                  <a:srgbClr val="1C1B19"/>
+                </a:solidFill>
+                <a:latin typeface="Source Serif 4"/>
+              </a:rPr>
+              <a:t>Which thought is the trap? (pairs)</a:t>
+            </a:r>
+          </a:p>
+          <a:p>
+            <a:pPr algn="l">
+              <a:spcAft>
+                <a:spcPts val="630"/>
+              </a:spcAft>
+            </a:pPr>
+            <a:r>
+              <a:rPr sz="1300" b="1" i="0">
+                <a:solidFill>
+                  <a:srgbClr val="F47B20"/>
+                </a:solidFill>
+                <a:latin typeface="Inter Tight"/>
+              </a:rPr>
+              <a:t>3 min   </a:t>
+            </a:r>
+            <a:r>
+              <a:rPr sz="1400" b="0" i="0">
+                <a:solidFill>
+                  <a:srgbClr val="1C1B19"/>
+                </a:solidFill>
+                <a:latin typeface="Source Serif 4"/>
+              </a:rPr>
+              <a:t>Set a done line (private card)</a:t>
+            </a:r>
+          </a:p>
+          <a:p>
+            <a:pPr algn="l">
+              <a:spcAft>
+                <a:spcPts val="630"/>
+              </a:spcAft>
+            </a:pPr>
+            <a:r>
+              <a:rPr sz="1300" b="1" i="0">
+                <a:solidFill>
+                  <a:srgbClr val="F47B20"/>
+                </a:solidFill>
+                <a:latin typeface="Inter Tight"/>
+              </a:rPr>
+              <a:t>2 min   </a:t>
+            </a:r>
+            <a:r>
+              <a:rPr sz="1400" b="0" i="0">
+                <a:solidFill>
+                  <a:srgbClr val="1C1B19"/>
+                </a:solidFill>
+                <a:latin typeface="Source Serif 4"/>
+              </a:rPr>
+              <a:t>One mistake experiment and the student page</a:t>
+            </a:r>
+          </a:p>
+          <a:p>
+            <a:pPr algn="l">
+              <a:spcAft>
+                <a:spcPts val="630"/>
+              </a:spcAft>
+            </a:pPr>
+            <a:r>
+              <a:rPr sz="1400" b="0" i="0">
+                <a:solidFill>
+                  <a:srgbClr val="1C1B19"/>
+                </a:solidFill>
+                <a:latin typeface="Source Serif 4"/>
+              </a:rPr>
+              <a:t/>
+            </a:r>
+          </a:p>
+          <a:p>
+            <a:pPr algn="l">
+              <a:spcAft>
+                <a:spcPts val="630"/>
+              </a:spcAft>
+            </a:pPr>
+            <a:r>
+              <a:rPr sz="1100" b="1" i="0">
+                <a:solidFill>
                   <a:srgbClr val="0B2D5B"/>
                 </a:solidFill>
                 <a:latin typeface="Inter Tight"/>
               </a:rPr>
-              <a:t>WEN, SENIOR</a:t>
-            </a:r>
-          </a:p>
-        </p:txBody>
-      </p:sp>
-      <p:sp>
-        <p:nvSpPr>
-          <p:cNvPr id="14" name="TextBox 13"/>
-          <p:cNvSpPr txBox="1"/>
-          <p:nvPr/>
-        </p:nvSpPr>
-        <p:spPr>
-          <a:xfrm>
-            <a:off x="8244839" y="2743200"/>
-            <a:ext cx="2865120" cy="3017520"/>
-          </a:xfrm>
-          <a:prstGeom prst="rect">
-            <a:avLst/>
-          </a:prstGeom>
-          <a:noFill/>
-        </p:spPr>
-        <p:txBody>
-          <a:bodyPr wrap="square" anchor="t" lIns="0" rIns="0" tIns="0" bIns="0">
-            <a:spAutoFit/>
-          </a:bodyPr>
-          <a:lstStyle/>
-          <a:p>
-            <a:pPr algn="l">
-              <a:spcAft>
-                <a:spcPts val="810"/>
-              </a:spcAft>
-            </a:pPr>
-            <a:r>
-              <a:rPr sz="1800" b="0" i="0">
+              <a:t>SHORT ON TIME (10-MINUTE CHECK-IN)</a:t>
+            </a:r>
+          </a:p>
+          <a:p>
+            <a:pPr algn="l">
+              <a:spcAft>
+                <a:spcPts val="630"/>
+              </a:spcAft>
+            </a:pPr>
+            <a:r>
+              <a:rPr sz="1400" b="0" i="0">
                 <a:solidFill>
                   <a:srgbClr val="1C1B19"/>
                 </a:solidFill>
                 <a:latin typeface="Source Serif 4"/>
               </a:rPr>
-              <a:t>The night before a group project is due, a partner sends a section with typos and a weak conclusion.</a:t>
+              <a:t>Sound familiar? (2), the two parts (3), set a done line (3), one mistake experiment and the student page (2).</a:t>
             </a:r>
           </a:p>
         </p:txBody>

--- a/decks/perfect-is-a-trap-lesson-v2.pptx
+++ b/decks/perfect-is-a-trap-lesson-v2.pptx
@@ -6001,6 +6001,45 @@
                 <a:latin typeface="Inter Tight"/>
               </a:rPr>
               <a:t>Beaver Upper School · Counseling</a:t>
+            </a:r>
+          </a:p>
+        </p:txBody>
+      </p:sp>
+      <p:sp>
+        <p:nvSpPr>
+          <p:cNvPr id="8" name="TextBox 7"/>
+          <p:cNvSpPr txBox="1"/>
+          <p:nvPr/>
+        </p:nvSpPr>
+        <p:spPr>
+          <a:xfrm>
+            <a:off x="6766560" y="5897880"/>
+            <a:ext cx="4846320" cy="640080"/>
+          </a:xfrm>
+          <a:prstGeom prst="rect">
+            <a:avLst/>
+          </a:prstGeom>
+          <a:noFill/>
+        </p:spPr>
+        <p:txBody>
+          <a:bodyPr wrap="square" anchor="t" lIns="0" rIns="0" tIns="0" bIns="0">
+            <a:spAutoFit/>
+          </a:bodyPr>
+          <a:lstStyle/>
+          <a:p>
+            <a:pPr algn="r">
+              <a:spcAft>
+                <a:spcPts val="495"/>
+              </a:spcAft>
+            </a:pPr>
+            <a:r>
+              <a:rPr sz="1100" b="0" i="0">
+                <a:solidFill>
+                  <a:srgbClr val="E8E4DA"/>
+                </a:solidFill>
+                <a:latin typeface="Inter Tight"/>
+              </a:rPr>
+              <a:t>Written by Dr. Rick Wilson, with AI-assisted drafting. Every lesson is reviewed and edited by Dr. Wilson.</a:t>
             </a:r>
           </a:p>
         </p:txBody>
